--- a/Topic_D/Exam_Practice/TD-L07_Speaking_Workshop_The_Workplace_and_Working_Conditions.pptx
+++ b/Topic_D/Exam_Practice/TD-L07_Speaking_Workshop_The_Workplace_and_Working_Conditions.pptx
@@ -615,7 +615,11 @@
           <a:lstStyle/>
           <a:p>
             <a:r>
-              <a:rPr lang="en-US" dirty="0"/>
+              <a:rPr lang="ar-SA" dirty="0">
+                <a:latin typeface="Amiri" pitchFamily="2" charset="-78"/>
+                <a:ea typeface="Amiri" pitchFamily="2" charset="-78"/>
+                <a:cs typeface="Amiri" pitchFamily="2" charset="-78"/>
+              </a:rPr>
               <a:t>ROLE PLAY C (Develop) — a job interview.
 SET-UP IN THE BREAKOUT ROOM: A = examiner (reads the left column ONLY — the questions, in order), B = candidate (sees the task column; Core may use the help column), C = observer (ticks the feedback checklist). 1 minute preparation, about 3 minutes speaking, 1 minute feedback, then rotate.
 Task ! is the unexpected question: in the exam the candidate has not seen it — the examiner should read it without warning.
@@ -707,7 +711,11 @@
           <a:lstStyle/>
           <a:p>
             <a:r>
-              <a:rPr lang="en-US" dirty="0"/>
+              <a:rPr lang="ar-SA" dirty="0">
+                <a:latin typeface="Amiri" pitchFamily="2" charset="-78"/>
+                <a:ea typeface="Amiri" pitchFamily="2" charset="-78"/>
+                <a:cs typeface="Amiri" pitchFamily="2" charset="-78"/>
+              </a:rPr>
               <a:t>ROLE PLAY D (Stretch) — a workers’ rights podcast.
 SET-UP IN THE BREAKOUT ROOM: A = examiner (reads the left column ONLY — the questions, in order), B = candidate (sees the task column; Core may use the help column), C = observer (ticks the feedback checklist). 1 minute preparation, about 3 minutes speaking, 1 minute feedback, then rotate.
 Task ! is the unexpected question: in the exam the candidate has not seen it — the examiner should read it without warning.
@@ -1243,7 +1251,11 @@
           <a:lstStyle/>
           <a:p>
             <a:r>
-              <a:rPr lang="en-US" dirty="0"/>
+              <a:rPr lang="ar-SA" dirty="0">
+                <a:latin typeface="Amiri" pitchFamily="2" charset="-78"/>
+                <a:ea typeface="Amiri" pitchFamily="2" charset="-78"/>
+                <a:cs typeface="Amiri" pitchFamily="2" charset="-78"/>
+              </a:rPr>
               <a:t>TOPIC CONVERSATION — Core. Examiner asks the questions in order and may add “لِمَاذَا؟ / هَلْ يُمْكِنُ أَنْ تَشْرَحَ أَكْثَرَ؟” to push for more. Candidate aims for one full sentence per question.
 </a:t>
             </a:r>
@@ -1332,7 +1344,11 @@
           <a:lstStyle/>
           <a:p>
             <a:r>
-              <a:rPr lang="en-US" dirty="0"/>
+              <a:rPr lang="ar-SA" dirty="0">
+                <a:latin typeface="Amiri" pitchFamily="2" charset="-78"/>
+                <a:ea typeface="Amiri" pitchFamily="2" charset="-78"/>
+                <a:cs typeface="Amiri" pitchFamily="2" charset="-78"/>
+              </a:rPr>
               <a:t>TOPIC CONVERSATION — Develop. Examiner asks the questions in order and may add “لِمَاذَا؟ / هَلْ يُمْكِنُ أَنْ تَشْرَحَ أَكْثَرَ؟” to push for more. Candidate aims for two or three sentences, with a comparison and a past detail.
 </a:t>
             </a:r>
@@ -1421,7 +1437,11 @@
           <a:lstStyle/>
           <a:p>
             <a:r>
-              <a:rPr lang="en-US" dirty="0"/>
+              <a:rPr lang="ar-SA" dirty="0">
+                <a:latin typeface="Amiri" pitchFamily="2" charset="-78"/>
+                <a:ea typeface="Amiri" pitchFamily="2" charset="-78"/>
+                <a:cs typeface="Amiri" pitchFamily="2" charset="-78"/>
+              </a:rPr>
               <a:t>TOPIC CONVERSATION — Stretch. Examiner asks the questions in order and may add “لِمَاذَا؟ / هَلْ يُمْكِنُ أَنْ تَشْرَحَ أَكْثَرَ؟” to push for more. Candidate aims for a developed answer: opinion, balance, concession and a conditional.
 </a:t>
             </a:r>
@@ -1510,7 +1530,11 @@
           <a:lstStyle/>
           <a:p>
             <a:r>
-              <a:rPr lang="en-US" dirty="0"/>
+              <a:rPr lang="ar-SA" dirty="0">
+                <a:latin typeface="Amiri" pitchFamily="2" charset="-78"/>
+                <a:ea typeface="Amiri" pitchFamily="2" charset="-78"/>
+                <a:cs typeface="Amiri" pitchFamily="2" charset="-78"/>
+              </a:rPr>
               <a:t>WELCOME (1 min) — while students join.
 • Greet each student by name as they arrive: السَّلَامُ عَلَيْكُمْ. Take the register (Pastoral Tracker: attendance 0/1).
 • 2-MINUTE CHECK-IN (SEND training): a private chat to any student who seemed unsettled last lesson — “Are you okay today? 👍 / 👎”.
@@ -2224,7 +2248,11 @@
           <a:lstStyle/>
           <a:p>
             <a:r>
-              <a:rPr lang="en-US" dirty="0"/>
+              <a:rPr lang="ar-SA" dirty="0">
+                <a:latin typeface="Amiri" pitchFamily="2" charset="-78"/>
+                <a:ea typeface="Amiri" pitchFamily="2" charset="-78"/>
+                <a:cs typeface="Amiri" pitchFamily="2" charset="-78"/>
+              </a:rPr>
               <a:t>TEACH (3 min). Role play = precise and complete; conversation = develop. Choral repetition of the repair phrases. To a girl: تُعِيدِي.</a:t>
             </a:r>
             <a:endParaRPr lang="en-US" dirty="0"/>
@@ -2312,7 +2340,11 @@
           <a:lstStyle/>
           <a:p>
             <a:r>
-              <a:rPr lang="en-US" dirty="0"/>
+              <a:rPr lang="ar-SA" dirty="0">
+                <a:latin typeface="Amiri" pitchFamily="2" charset="-78"/>
+                <a:ea typeface="Amiri" pitchFamily="2" charset="-78"/>
+                <a:cs typeface="Amiri" pitchFamily="2" charset="-78"/>
+              </a:rPr>
               <a:t>LANGUAGE BANK (2 min) — workplaces and people: أَعْمَلُ فِي مَحَلٍّ · زُمَلَائِي لُطَفَاءُ · المُدِيرَةُ صَارِمَةٌ. Hours: أَعْمَلُ مِنَ السَّاعَةِ التَّاسِعَةِ إِلَى الخَامِسَةِ · مَرَّتَيْنِ فِي الأُسْبُوعِ.</a:t>
             </a:r>
             <a:endParaRPr lang="en-US" dirty="0"/>
@@ -2400,7 +2432,11 @@
           <a:lstStyle/>
           <a:p>
             <a:r>
-              <a:rPr lang="en-US" dirty="0"/>
+              <a:rPr lang="ar-SA" dirty="0">
+                <a:latin typeface="Amiri" pitchFamily="2" charset="-78"/>
+                <a:ea typeface="Amiri" pitchFamily="2" charset="-78"/>
+                <a:cs typeface="Amiri" pitchFamily="2" charset="-78"/>
+              </a:rPr>
               <a:t>LANGUAGE BANK (2 min) — comparatives + tamyīz: أَكْثَرُ رَاحَةً · أَعْلَى أَجْرًا · أَطْوَلُ سَاعَاتٍ. kāna + accusative: كَانَ العَمَلُ مُمِلًّا. kāna + present = used to: كُنْتُ أَعْمَلُ فِي مَقْهًى.</a:t>
             </a:r>
             <a:endParaRPr lang="en-US" dirty="0"/>
@@ -2576,7 +2612,11 @@
           <a:lstStyle/>
           <a:p>
             <a:r>
-              <a:rPr lang="en-US" dirty="0"/>
+              <a:rPr lang="ar-SA" dirty="0">
+                <a:latin typeface="Amiri" pitchFamily="2" charset="-78"/>
+                <a:ea typeface="Amiri" pitchFamily="2" charset="-78"/>
+                <a:cs typeface="Amiri" pitchFamily="2" charset="-78"/>
+              </a:rPr>
               <a:t>ROLE PLAY A (Core) — a café job.
 SET-UP IN THE BREAKOUT ROOM: A = examiner (reads the left column ONLY — the questions, in order), B = candidate (sees the task column; Core may use the help column), C = observer (ticks the feedback checklist). 1 minute preparation, about 3 minutes speaking, 1 minute feedback, then rotate.
 Task ! is the unexpected question: in the exam the candidate has not seen it — the examiner should read it without warning.
@@ -2668,7 +2708,11 @@
           <a:lstStyle/>
           <a:p>
             <a:r>
-              <a:rPr lang="en-US" dirty="0"/>
+              <a:rPr lang="ar-SA" dirty="0">
+                <a:latin typeface="Amiri" pitchFamily="2" charset="-78"/>
+                <a:ea typeface="Amiri" pitchFamily="2" charset="-78"/>
+                <a:cs typeface="Amiri" pitchFamily="2" charset="-78"/>
+              </a:rPr>
               <a:t>ROLE PLAY B (Core+) — comparing two job offers.
 SET-UP IN THE BREAKOUT ROOM: A = examiner (reads the left column ONLY — the questions, in order), B = candidate (sees the task column; Core may use the help column), C = observer (ticks the feedback checklist). 1 minute preparation, about 3 minutes speaking, 1 minute feedback, then rotate.
 Task ! is the unexpected question: in the exam the candidate has not seen it — the examiner should read it without warning.
@@ -3156,6 +3200,7 @@
                   <a:srgbClr val="D4AF37"/>
                 </a:solidFill>
                 <a:latin typeface="Amiri" pitchFamily="2" charset="-78"/>
+                <a:ea typeface="Amiri" pitchFamily="2" charset="-78"/>
                 <a:cs typeface="Amiri" pitchFamily="2" charset="-78"/>
               </a:rPr>
               <a:t>م</a:t>
@@ -3362,6 +3407,7 @@
                   <a:srgbClr val="D4AF37"/>
                 </a:solidFill>
                 <a:latin typeface="Amiri" pitchFamily="2" charset="-78"/>
+                <a:ea typeface="Amiri" pitchFamily="2" charset="-78"/>
                 <a:cs typeface="Amiri" pitchFamily="2" charset="-78"/>
               </a:rPr>
               <a:t>وَرْشَةُ التَّحَدُّثِ — مَكَانُ العَمَلِ وَظُرُوفُهُ</a:t>
@@ -3413,6 +3459,7 @@
                   <a:srgbClr val="C6D2E6"/>
                 </a:solidFill>
                 <a:latin typeface="Amiri" pitchFamily="2" charset="-78"/>
+                <a:ea typeface="Amiri" pitchFamily="2" charset="-78"/>
                 <a:cs typeface="Amiri" pitchFamily="2" charset="-78"/>
               </a:rPr>
               <a:t>مِنَ التَّاسِعَةِ إِلَى الخَامِسَةِ</a:t>
@@ -3439,6 +3486,7 @@
                   <a:srgbClr val="C6D2E6"/>
                 </a:solidFill>
                 <a:latin typeface="Amiri" pitchFamily="2" charset="-78"/>
+                <a:ea typeface="Amiri" pitchFamily="2" charset="-78"/>
                 <a:cs typeface="Amiri" pitchFamily="2" charset="-78"/>
               </a:rPr>
               <a:t>أَطْوَلُ مِنْ</a:t>
@@ -3465,6 +3513,7 @@
                   <a:srgbClr val="C6D2E6"/>
                 </a:solidFill>
                 <a:latin typeface="Amiri" pitchFamily="2" charset="-78"/>
+                <a:ea typeface="Amiri" pitchFamily="2" charset="-78"/>
                 <a:cs typeface="Amiri" pitchFamily="2" charset="-78"/>
               </a:rPr>
               <a:t>أَكْثَرُ رَاحَةً مِنْ</a:t>
@@ -3491,6 +3540,7 @@
                   <a:srgbClr val="C6D2E6"/>
                 </a:solidFill>
                 <a:latin typeface="Amiri" pitchFamily="2" charset="-78"/>
+                <a:ea typeface="Amiri" pitchFamily="2" charset="-78"/>
                 <a:cs typeface="Amiri" pitchFamily="2" charset="-78"/>
               </a:rPr>
               <a:t>كَانَ</a:t>
@@ -3923,6 +3973,7 @@
                   <a:srgbClr val="D4AF37"/>
                 </a:solidFill>
                 <a:latin typeface="Amiri" pitchFamily="2" charset="-78"/>
+                <a:ea typeface="Amiri" pitchFamily="2" charset="-78"/>
                 <a:cs typeface="Amiri" pitchFamily="2" charset="-78"/>
               </a:rPr>
               <a:t>م</a:t>
@@ -4243,6 +4294,7 @@
                   <a:srgbClr val="8A6D1E"/>
                 </a:solidFill>
                 <a:latin typeface="Amiri" pitchFamily="2" charset="-78"/>
+                <a:ea typeface="Amiri" pitchFamily="2" charset="-78"/>
                 <a:cs typeface="Amiri" pitchFamily="2" charset="-78"/>
               </a:rPr>
               <a:t>عَمَلِي السَّابِقُ</a:t>
@@ -4523,6 +4575,7 @@
                   <a:srgbClr val="1B3B6F"/>
                 </a:solidFill>
                 <a:latin typeface="Amiri" pitchFamily="2" charset="-78"/>
+                <a:ea typeface="Amiri" pitchFamily="2" charset="-78"/>
                 <a:cs typeface="Amiri" pitchFamily="2" charset="-78"/>
               </a:rPr>
               <a:t>كُنْتُ أَعْمَلُ فِي … مِنْ … إِلَى …</a:t>
@@ -4599,6 +4652,7 @@
                   <a:srgbClr val="1B3B6F"/>
                 </a:solidFill>
                 <a:latin typeface="Amiri" pitchFamily="2" charset="-78"/>
+                <a:ea typeface="Amiri" pitchFamily="2" charset="-78"/>
                 <a:cs typeface="Amiri" pitchFamily="2" charset="-78"/>
               </a:rPr>
               <a:t>أَيْنَ كُنْتَ تَعْمَلُ قَبْلَ هٰذَا؟</a:t>
@@ -4702,6 +4756,7 @@
                   <a:srgbClr val="1B3B6F"/>
                 </a:solidFill>
                 <a:latin typeface="Amiri" pitchFamily="2" charset="-78"/>
+                <a:ea typeface="Amiri" pitchFamily="2" charset="-78"/>
                 <a:cs typeface="Amiri" pitchFamily="2" charset="-78"/>
               </a:rPr>
               <a:t>كَانَ … وَكَانَتْ …</a:t>
@@ -4778,6 +4833,7 @@
                   <a:srgbClr val="1B3B6F"/>
                 </a:solidFill>
                 <a:latin typeface="Amiri" pitchFamily="2" charset="-78"/>
+                <a:ea typeface="Amiri" pitchFamily="2" charset="-78"/>
                 <a:cs typeface="Amiri" pitchFamily="2" charset="-78"/>
               </a:rPr>
               <a:t>وَكَيْفَ كَانَتْ ظُرُوفُ العَمَلِ؟</a:t>
@@ -4881,6 +4937,7 @@
                   <a:srgbClr val="1B3B6F"/>
                 </a:solidFill>
                 <a:latin typeface="Amiri" pitchFamily="2" charset="-78"/>
+                <a:ea typeface="Amiri" pitchFamily="2" charset="-78"/>
                 <a:cs typeface="Amiri" pitchFamily="2" charset="-78"/>
               </a:rPr>
               <a:t>تَرَكْتُهُ لِأَنَّ …</a:t>
@@ -4957,6 +5014,7 @@
                   <a:srgbClr val="1B3B6F"/>
                 </a:solidFill>
                 <a:latin typeface="Amiri" pitchFamily="2" charset="-78"/>
+                <a:ea typeface="Amiri" pitchFamily="2" charset="-78"/>
                 <a:cs typeface="Amiri" pitchFamily="2" charset="-78"/>
               </a:rPr>
               <a:t>لِمَاذَا تَرَكْتَ العَمَلَ؟</a:t>
@@ -5060,6 +5118,7 @@
                   <a:srgbClr val="1B3B6F"/>
                 </a:solidFill>
                 <a:latin typeface="Amiri" pitchFamily="2" charset="-78"/>
+                <a:ea typeface="Amiri" pitchFamily="2" charset="-78"/>
                 <a:cs typeface="Amiri" pitchFamily="2" charset="-78"/>
               </a:rPr>
               <a:t>هٰذَا أَكْثَرُ … مِنْ … لٰكِنَّ …</a:t>
@@ -5136,6 +5195,7 @@
                   <a:srgbClr val="1B3B6F"/>
                 </a:solidFill>
                 <a:latin typeface="Amiri" pitchFamily="2" charset="-78"/>
+                <a:ea typeface="Amiri" pitchFamily="2" charset="-78"/>
                 <a:cs typeface="Amiri" pitchFamily="2" charset="-78"/>
               </a:rPr>
               <a:t>عَمَلُنَا هُنَا فِي نِهَايَةِ الأُسْبُوعِ وَبَعْضِ الأُمْسِيَاتِ.</a:t>
@@ -5239,6 +5299,7 @@
                   <a:srgbClr val="1B3B6F"/>
                 </a:solidFill>
                 <a:latin typeface="Amiri" pitchFamily="2" charset="-78"/>
+                <a:ea typeface="Amiri" pitchFamily="2" charset="-78"/>
                 <a:cs typeface="Amiri" pitchFamily="2" charset="-78"/>
               </a:rPr>
               <a:t>إِذَا غَضِبَ …، فَإِنِّي أَسْتَمِعُ …</a:t>
@@ -5315,6 +5376,7 @@
                   <a:srgbClr val="1B3B6F"/>
                 </a:solidFill>
                 <a:latin typeface="Amiri" pitchFamily="2" charset="-78"/>
+                <a:ea typeface="Amiri" pitchFamily="2" charset="-78"/>
                 <a:cs typeface="Amiri" pitchFamily="2" charset="-78"/>
               </a:rPr>
               <a:t>مَاذَا تَفْعَلُ إِذَا غَضِبَ زَبُونٌ؟</a:t>
@@ -5524,6 +5586,7 @@
                   <a:srgbClr val="D4AF37"/>
                 </a:solidFill>
                 <a:latin typeface="Amiri" pitchFamily="2" charset="-78"/>
+                <a:ea typeface="Amiri" pitchFamily="2" charset="-78"/>
                 <a:cs typeface="Amiri" pitchFamily="2" charset="-78"/>
               </a:rPr>
               <a:t>م</a:t>
@@ -5844,6 +5907,7 @@
                   <a:srgbClr val="8A6D1E"/>
                 </a:solidFill>
                 <a:latin typeface="Amiri" pitchFamily="2" charset="-78"/>
+                <a:ea typeface="Amiri" pitchFamily="2" charset="-78"/>
                 <a:cs typeface="Amiri" pitchFamily="2" charset="-78"/>
               </a:rPr>
               <a:t>العَمَلُ أَثْنَاءَ الدِّرَاسَةِ</a:t>
@@ -6124,6 +6188,7 @@
                   <a:srgbClr val="1B3B6F"/>
                 </a:solidFill>
                 <a:latin typeface="Amiri" pitchFamily="2" charset="-78"/>
+                <a:ea typeface="Amiri" pitchFamily="2" charset="-78"/>
                 <a:cs typeface="Amiri" pitchFamily="2" charset="-78"/>
               </a:rPr>
               <a:t>مِنْ نَاحِيَةٍ … وَمِنْ نَاحِيَةٍ أُخْرَى …</a:t>
@@ -6200,6 +6265,7 @@
                   <a:srgbClr val="1B3B6F"/>
                 </a:solidFill>
                 <a:latin typeface="Amiri" pitchFamily="2" charset="-78"/>
+                <a:ea typeface="Amiri" pitchFamily="2" charset="-78"/>
                 <a:cs typeface="Amiri" pitchFamily="2" charset="-78"/>
               </a:rPr>
               <a:t>هَلْ يَنْبَغِي أَنْ يَعْمَلَ المُرَاهِقُونَ أَثْنَاءَ الدِّرَاسَةِ؟</a:t>
@@ -6303,6 +6369,7 @@
                   <a:srgbClr val="1B3B6F"/>
                 </a:solidFill>
                 <a:latin typeface="Amiri" pitchFamily="2" charset="-78"/>
+                <a:ea typeface="Amiri" pitchFamily="2" charset="-78"/>
                 <a:cs typeface="Amiri" pitchFamily="2" charset="-78"/>
               </a:rPr>
               <a:t>كُنْتُ أَعْمَلُ … فَلَاحَظْتُ أَنَّ …</a:t>
@@ -6379,6 +6446,7 @@
                   <a:srgbClr val="1B3B6F"/>
                 </a:solidFill>
                 <a:latin typeface="Amiri" pitchFamily="2" charset="-78"/>
+                <a:ea typeface="Amiri" pitchFamily="2" charset="-78"/>
                 <a:cs typeface="Amiri" pitchFamily="2" charset="-78"/>
               </a:rPr>
               <a:t>وَمَا تَجْرِبَتُكَ أَنْتَ؟</a:t>
@@ -6482,6 +6550,7 @@
                   <a:srgbClr val="1B3B6F"/>
                 </a:solidFill>
                 <a:latin typeface="Amiri" pitchFamily="2" charset="-78"/>
+                <a:ea typeface="Amiri" pitchFamily="2" charset="-78"/>
                 <a:cs typeface="Amiri" pitchFamily="2" charset="-78"/>
               </a:rPr>
               <a:t>صَحِيحٌ أَنَّ … غَيْرَ أَنَّهُ يَجِبُ عَلَى …</a:t>
@@ -6558,6 +6627,7 @@
                   <a:srgbClr val="1B3B6F"/>
                 </a:solidFill>
                 <a:latin typeface="Amiri" pitchFamily="2" charset="-78"/>
+                <a:ea typeface="Amiri" pitchFamily="2" charset="-78"/>
                 <a:cs typeface="Amiri" pitchFamily="2" charset="-78"/>
               </a:rPr>
               <a:t>لٰكِنَّ بَعْضَ الأُسَرِ تَحْتَاجُ إِلَى هٰذَا المَالِ.</a:t>
@@ -6664,6 +6734,7 @@
                   <a:srgbClr val="1B3B6F"/>
                 </a:solidFill>
                 <a:latin typeface="Amiri" pitchFamily="2" charset="-78"/>
+                <a:ea typeface="Amiri" pitchFamily="2" charset="-78"/>
                 <a:cs typeface="Amiri" pitchFamily="2" charset="-78"/>
               </a:rPr>
               <a:t>كَانَ كَثِيرٌ مِنَ الأَطْفَالِ … أَمَّا اليَوْمَ فَتَحْمِيهِمْ …</a:t>
@@ -6740,6 +6811,7 @@
                   <a:srgbClr val="1B3B6F"/>
                 </a:solidFill>
                 <a:latin typeface="Amiri" pitchFamily="2" charset="-78"/>
+                <a:ea typeface="Amiri" pitchFamily="2" charset="-78"/>
                 <a:cs typeface="Amiri" pitchFamily="2" charset="-78"/>
               </a:rPr>
               <a:t>كَيْفَ كَانَتْ ظُرُوفُ العَمَلِ لِلشَّبَابِ فِي المَاضِي؟</a:t>
@@ -6843,6 +6915,7 @@
                   <a:srgbClr val="1B3B6F"/>
                 </a:solidFill>
                 <a:latin typeface="Amiri" pitchFamily="2" charset="-78"/>
+                <a:ea typeface="Amiri" pitchFamily="2" charset="-78"/>
                 <a:cs typeface="Amiri" pitchFamily="2" charset="-78"/>
               </a:rPr>
               <a:t>لَوْ كُنْتُ …، لَأَعْطَيْتُ …</a:t>
@@ -6919,6 +6992,7 @@
                   <a:srgbClr val="1B3B6F"/>
                 </a:solidFill>
                 <a:latin typeface="Amiri" pitchFamily="2" charset="-78"/>
+                <a:ea typeface="Amiri" pitchFamily="2" charset="-78"/>
                 <a:cs typeface="Amiri" pitchFamily="2" charset="-78"/>
               </a:rPr>
               <a:t>لَوْ كُنْتَ صَاحِبَ عَمَلٍ، كَيْفَ تُعَامِلُ المُوَظَّفِينَ الشَّبَابَ؟</a:t>
@@ -7128,6 +7202,7 @@
                   <a:srgbClr val="D4AF37"/>
                 </a:solidFill>
                 <a:latin typeface="Amiri" pitchFamily="2" charset="-78"/>
+                <a:ea typeface="Amiri" pitchFamily="2" charset="-78"/>
                 <a:cs typeface="Amiri" pitchFamily="2" charset="-78"/>
               </a:rPr>
               <a:t>م</a:t>
@@ -7448,6 +7523,7 @@
                   <a:srgbClr val="8A6D1E"/>
                 </a:solidFill>
                 <a:latin typeface="Amiri" pitchFamily="2" charset="-78"/>
+                <a:ea typeface="Amiri" pitchFamily="2" charset="-78"/>
                 <a:cs typeface="Amiri" pitchFamily="2" charset="-78"/>
               </a:rPr>
               <a:t>وَرَقَةُ المُلَاحِظِ</a:t>
@@ -8918,6 +8994,7 @@
                   <a:srgbClr val="D4AF37"/>
                 </a:solidFill>
                 <a:latin typeface="Amiri" pitchFamily="2" charset="-78"/>
+                <a:ea typeface="Amiri" pitchFamily="2" charset="-78"/>
                 <a:cs typeface="Amiri" pitchFamily="2" charset="-78"/>
               </a:rPr>
               <a:t>م</a:t>
@@ -9238,6 +9315,7 @@
                   <a:srgbClr val="8A6D1E"/>
                 </a:solidFill>
                 <a:latin typeface="Amiri" pitchFamily="2" charset="-78"/>
+                <a:ea typeface="Amiri" pitchFamily="2" charset="-78"/>
                 <a:cs typeface="Amiri" pitchFamily="2" charset="-78"/>
               </a:rPr>
               <a:t>نَمُوذَجُ الإِجَابَةِ</a:t>
@@ -9480,6 +9558,7 @@
                   <a:srgbClr val="1B3B6F"/>
                 </a:solidFill>
                 <a:latin typeface="Amiri" pitchFamily="2" charset="-78"/>
+                <a:ea typeface="Amiri" pitchFamily="2" charset="-78"/>
                 <a:cs typeface="Amiri" pitchFamily="2" charset="-78"/>
               </a:rPr>
               <a:t>رَأَيْتُ إِعْلَانَ العَمَلِ فِي النَّافِذَةِ.</a:t>
@@ -9556,6 +9635,7 @@
                   <a:srgbClr val="1B3B6F"/>
                 </a:solidFill>
                 <a:latin typeface="Amiri" pitchFamily="2" charset="-78"/>
+                <a:ea typeface="Amiri" pitchFamily="2" charset="-78"/>
                 <a:cs typeface="Amiri" pitchFamily="2" charset="-78"/>
               </a:rPr>
               <a:t>أَهْلًا! كَيْفَ أُسَاعِدُكَ؟</a:t>
@@ -9659,6 +9739,7 @@
                   <a:srgbClr val="1B3B6F"/>
                 </a:solidFill>
                 <a:latin typeface="Amiri" pitchFamily="2" charset="-78"/>
+                <a:ea typeface="Amiri" pitchFamily="2" charset="-78"/>
                 <a:cs typeface="Amiri" pitchFamily="2" charset="-78"/>
               </a:rPr>
               <a:t>أَسْتَطِيعُ أَنْ أَعْمَلَ يَوْمَ السَّبْتِ وَيَوْمَ الأَحَدِ.</a:t>
@@ -9735,6 +9816,7 @@
                   <a:srgbClr val="1B3B6F"/>
                 </a:solidFill>
                 <a:latin typeface="Amiri" pitchFamily="2" charset="-78"/>
+                <a:ea typeface="Amiri" pitchFamily="2" charset="-78"/>
                 <a:cs typeface="Amiri" pitchFamily="2" charset="-78"/>
               </a:rPr>
               <a:t>مَتَى تَسْتَطِيعُ أَنْ تَعْمَلَ؟</a:t>
@@ -9838,6 +9920,7 @@
                   <a:srgbClr val="1B3B6F"/>
                 </a:solidFill>
                 <a:latin typeface="Amiri" pitchFamily="2" charset="-78"/>
+                <a:ea typeface="Amiri" pitchFamily="2" charset="-78"/>
                 <a:cs typeface="Amiri" pitchFamily="2" charset="-78"/>
               </a:rPr>
               <a:t>كَمِ الأَجْرُ فِي السَّاعَةِ؟</a:t>
@@ -9914,6 +9997,7 @@
                   <a:srgbClr val="1B3B6F"/>
                 </a:solidFill>
                 <a:latin typeface="Amiri" pitchFamily="2" charset="-78"/>
+                <a:ea typeface="Amiri" pitchFamily="2" charset="-78"/>
                 <a:cs typeface="Amiri" pitchFamily="2" charset="-78"/>
               </a:rPr>
               <a:t>العَمَلُ مِنَ التَّاسِعَةِ إِلَى الثَّالِثَةِ.</a:t>
@@ -10017,6 +10101,7 @@
                   <a:srgbClr val="1B3B6F"/>
                 </a:solidFill>
                 <a:latin typeface="Amiri" pitchFamily="2" charset="-78"/>
+                <a:ea typeface="Amiri" pitchFamily="2" charset="-78"/>
                 <a:cs typeface="Amiri" pitchFamily="2" charset="-78"/>
               </a:rPr>
               <a:t>وَمَاذَا سَأَفْعَلُ فِي العَمَلِ؟</a:t>
@@ -10093,6 +10178,7 @@
                   <a:srgbClr val="1B3B6F"/>
                 </a:solidFill>
                 <a:latin typeface="Amiri" pitchFamily="2" charset="-78"/>
+                <a:ea typeface="Amiri" pitchFamily="2" charset="-78"/>
                 <a:cs typeface="Amiri" pitchFamily="2" charset="-78"/>
               </a:rPr>
               <a:t>عَشَرَةُ جُنَيْهَاتٍ.</a:t>
@@ -10196,6 +10282,7 @@
                   <a:srgbClr val="1B3B6F"/>
                 </a:solidFill>
                 <a:latin typeface="Amiri" pitchFamily="2" charset="-78"/>
+                <a:ea typeface="Amiri" pitchFamily="2" charset="-78"/>
                 <a:cs typeface="Amiri" pitchFamily="2" charset="-78"/>
               </a:rPr>
               <a:t>نَعَمْ، عَمِلْتُ فِي مَحَلِّ عَمِّي فِي الصَّيْفِ.</a:t>
@@ -10272,6 +10359,7 @@
                   <a:srgbClr val="1B3B6F"/>
                 </a:solidFill>
                 <a:latin typeface="Amiri" pitchFamily="2" charset="-78"/>
+                <a:ea typeface="Amiri" pitchFamily="2" charset="-78"/>
                 <a:cs typeface="Amiri" pitchFamily="2" charset="-78"/>
               </a:rPr>
               <a:t>هَلْ عَمِلْتَ مِنْ قَبْلُ؟</a:t>
@@ -10481,6 +10569,7 @@
                   <a:srgbClr val="D4AF37"/>
                 </a:solidFill>
                 <a:latin typeface="Amiri" pitchFamily="2" charset="-78"/>
+                <a:ea typeface="Amiri" pitchFamily="2" charset="-78"/>
                 <a:cs typeface="Amiri" pitchFamily="2" charset="-78"/>
               </a:rPr>
               <a:t>م</a:t>
@@ -10801,6 +10890,7 @@
                   <a:srgbClr val="8A6D1E"/>
                 </a:solidFill>
                 <a:latin typeface="Amiri" pitchFamily="2" charset="-78"/>
+                <a:ea typeface="Amiri" pitchFamily="2" charset="-78"/>
                 <a:cs typeface="Amiri" pitchFamily="2" charset="-78"/>
               </a:rPr>
               <a:t>نَمُوذَجُ الإِجَابَةِ</a:t>
@@ -11043,6 +11133,7 @@
                   <a:srgbClr val="1B3B6F"/>
                 </a:solidFill>
                 <a:latin typeface="Amiri" pitchFamily="2" charset="-78"/>
+                <a:ea typeface="Amiri" pitchFamily="2" charset="-78"/>
                 <a:cs typeface="Amiri" pitchFamily="2" charset="-78"/>
               </a:rPr>
               <a:t>الأَوَّلُ فِي مَطْعَمٍ، وَالثَّانِي فِي مَكْتَبَةٍ.</a:t>
@@ -11119,6 +11210,7 @@
                   <a:srgbClr val="1B3B6F"/>
                 </a:solidFill>
                 <a:latin typeface="Amiri" pitchFamily="2" charset="-78"/>
+                <a:ea typeface="Amiri" pitchFamily="2" charset="-78"/>
                 <a:cs typeface="Amiri" pitchFamily="2" charset="-78"/>
               </a:rPr>
               <a:t>مَا العَمَلَانِ؟</a:t>
@@ -11222,6 +11314,7 @@
                   <a:srgbClr val="1B3B6F"/>
                 </a:solidFill>
                 <a:latin typeface="Amiri" pitchFamily="2" charset="-78"/>
+                <a:ea typeface="Amiri" pitchFamily="2" charset="-78"/>
                 <a:cs typeface="Amiri" pitchFamily="2" charset="-78"/>
               </a:rPr>
               <a:t>سَاعَاتُ المَطْعَمِ أَطْوَلُ مِنْ سَاعَاتِ المَكْتَبَةِ.</a:t>
@@ -11298,6 +11391,7 @@
                   <a:srgbClr val="1B3B6F"/>
                 </a:solidFill>
                 <a:latin typeface="Amiri" pitchFamily="2" charset="-78"/>
+                <a:ea typeface="Amiri" pitchFamily="2" charset="-78"/>
                 <a:cs typeface="Amiri" pitchFamily="2" charset="-78"/>
               </a:rPr>
               <a:t>وَالسَّاعَاتُ؟</a:t>
@@ -11401,6 +11495,7 @@
                   <a:srgbClr val="1B3B6F"/>
                 </a:solidFill>
                 <a:latin typeface="Amiri" pitchFamily="2" charset="-78"/>
+                <a:ea typeface="Amiri" pitchFamily="2" charset="-78"/>
                 <a:cs typeface="Amiri" pitchFamily="2" charset="-78"/>
               </a:rPr>
               <a:t>المَطْعَمُ أَعْلَى أَجْرًا، لٰكِنَّ المَكْتَبَةَ أَهْدَأُ وَأَكْثَرُ رَاحَةً.</a:t>
@@ -11477,6 +11572,7 @@
                   <a:srgbClr val="1B3B6F"/>
                 </a:solidFill>
                 <a:latin typeface="Amiri" pitchFamily="2" charset="-78"/>
+                <a:ea typeface="Amiri" pitchFamily="2" charset="-78"/>
                 <a:cs typeface="Amiri" pitchFamily="2" charset="-78"/>
               </a:rPr>
               <a:t>وَالأَجْرُ؟</a:t>
@@ -11580,6 +11676,7 @@
                   <a:srgbClr val="1B3B6F"/>
                 </a:solidFill>
                 <a:latin typeface="Amiri" pitchFamily="2" charset="-78"/>
+                <a:ea typeface="Amiri" pitchFamily="2" charset="-78"/>
                 <a:cs typeface="Amiri" pitchFamily="2" charset="-78"/>
               </a:rPr>
               <a:t>كَيْفَ هُوَ؟ هَلْ هُوَ لَطِيفٌ مَعَ المُوَظَّفِينَ؟</a:t>
@@ -11656,6 +11753,7 @@
                   <a:srgbClr val="1B3B6F"/>
                 </a:solidFill>
                 <a:latin typeface="Amiri" pitchFamily="2" charset="-78"/>
+                <a:ea typeface="Amiri" pitchFamily="2" charset="-78"/>
                 <a:cs typeface="Amiri" pitchFamily="2" charset="-78"/>
               </a:rPr>
               <a:t>أَنَا أَعْرِفُ مُدِيرَ المَكْتَبَةِ.</a:t>
@@ -11759,6 +11857,7 @@
                   <a:srgbClr val="1B3B6F"/>
                 </a:solidFill>
                 <a:latin typeface="Amiri" pitchFamily="2" charset="-78"/>
+                <a:ea typeface="Amiri" pitchFamily="2" charset="-78"/>
                 <a:cs typeface="Amiri" pitchFamily="2" charset="-78"/>
               </a:rPr>
               <a:t>سَأَخْتَارُ المَكْتَبَةَ، لِأَنِّي أُحِبُّ الكُتُبَ، وَسَأَسْتَطِيعُ أَنْ أُرَاجِعَ دُرُوسِي هُنَاكَ.</a:t>
@@ -11835,6 +11934,7 @@
                   <a:srgbClr val="1B3B6F"/>
                 </a:solidFill>
                 <a:latin typeface="Amiri" pitchFamily="2" charset="-78"/>
+                <a:ea typeface="Amiri" pitchFamily="2" charset="-78"/>
                 <a:cs typeface="Amiri" pitchFamily="2" charset="-78"/>
               </a:rPr>
               <a:t>إِذَنْ، أَيُّهُمَا سَتَخْتَارُ؟</a:t>
@@ -12044,6 +12144,7 @@
                   <a:srgbClr val="D4AF37"/>
                 </a:solidFill>
                 <a:latin typeface="Amiri" pitchFamily="2" charset="-78"/>
+                <a:ea typeface="Amiri" pitchFamily="2" charset="-78"/>
                 <a:cs typeface="Amiri" pitchFamily="2" charset="-78"/>
               </a:rPr>
               <a:t>م</a:t>
@@ -12364,6 +12465,7 @@
                   <a:srgbClr val="8A6D1E"/>
                 </a:solidFill>
                 <a:latin typeface="Amiri" pitchFamily="2" charset="-78"/>
+                <a:ea typeface="Amiri" pitchFamily="2" charset="-78"/>
                 <a:cs typeface="Amiri" pitchFamily="2" charset="-78"/>
               </a:rPr>
               <a:t>نَمُوذَجُ الإِجَابَةِ</a:t>
@@ -12606,6 +12708,7 @@
                   <a:srgbClr val="1B3B6F"/>
                 </a:solidFill>
                 <a:latin typeface="Amiri" pitchFamily="2" charset="-78"/>
+                <a:ea typeface="Amiri" pitchFamily="2" charset="-78"/>
                 <a:cs typeface="Amiri" pitchFamily="2" charset="-78"/>
               </a:rPr>
               <a:t>كُنْتُ أَعْمَلُ فِي مَقْهًى قُرْبَ المَحَطَّةِ، مِنَ السَّابِعَةِ صَبَاحًا إِلَى الظُّهْرِ، كُلَّ يَوْمِ سَبْتٍ.</a:t>
@@ -12682,6 +12785,7 @@
                   <a:srgbClr val="1B3B6F"/>
                 </a:solidFill>
                 <a:latin typeface="Amiri" pitchFamily="2" charset="-78"/>
+                <a:ea typeface="Amiri" pitchFamily="2" charset="-78"/>
                 <a:cs typeface="Amiri" pitchFamily="2" charset="-78"/>
               </a:rPr>
               <a:t>أَيْنَ كُنْتَ تَعْمَلُ قَبْلَ هٰذَا؟</a:t>
@@ -12785,6 +12889,7 @@
                   <a:srgbClr val="1B3B6F"/>
                 </a:solidFill>
                 <a:latin typeface="Amiri" pitchFamily="2" charset="-78"/>
+                <a:ea typeface="Amiri" pitchFamily="2" charset="-78"/>
                 <a:cs typeface="Amiri" pitchFamily="2" charset="-78"/>
               </a:rPr>
               <a:t>كَانَ المُدِيرُ عَادِلًا، وَكَانَ الزُّمَلَاءُ لُطَفَاءَ، لٰكِنَّ المَكَانَ كَانَ ضَيِّقًا وَمُزْدَحِمًا.</a:t>
@@ -12861,6 +12966,7 @@
                   <a:srgbClr val="1B3B6F"/>
                 </a:solidFill>
                 <a:latin typeface="Amiri" pitchFamily="2" charset="-78"/>
+                <a:ea typeface="Amiri" pitchFamily="2" charset="-78"/>
                 <a:cs typeface="Amiri" pitchFamily="2" charset="-78"/>
               </a:rPr>
               <a:t>وَكَيْفَ كَانَتْ ظُرُوفُ العَمَلِ؟</a:t>
@@ -12964,6 +13070,7 @@
                   <a:srgbClr val="1B3B6F"/>
                 </a:solidFill>
                 <a:latin typeface="Amiri" pitchFamily="2" charset="-78"/>
+                <a:ea typeface="Amiri" pitchFamily="2" charset="-78"/>
                 <a:cs typeface="Amiri" pitchFamily="2" charset="-78"/>
               </a:rPr>
               <a:t>تَرَكْتُهُ لِأَنَّ المَقْهَى أُغْلِقَ بَعْدَ أَنْ بِيعَ المَبْنَى.</a:t>
@@ -13040,6 +13147,7 @@
                   <a:srgbClr val="1B3B6F"/>
                 </a:solidFill>
                 <a:latin typeface="Amiri" pitchFamily="2" charset="-78"/>
+                <a:ea typeface="Amiri" pitchFamily="2" charset="-78"/>
                 <a:cs typeface="Amiri" pitchFamily="2" charset="-78"/>
               </a:rPr>
               <a:t>لِمَاذَا تَرَكْتَ العَمَلَ؟</a:t>
@@ -13143,6 +13251,7 @@
                   <a:srgbClr val="1B3B6F"/>
                 </a:solidFill>
                 <a:latin typeface="Amiri" pitchFamily="2" charset="-78"/>
+                <a:ea typeface="Amiri" pitchFamily="2" charset="-78"/>
                 <a:cs typeface="Amiri" pitchFamily="2" charset="-78"/>
               </a:rPr>
               <a:t>هٰذَا أَكْثَرُ سَاعَاتٍ مِنْ عَمَلِي السَّابِقِ، لٰكِنِّي أَسْتَطِيعُ أَنْ أُنَظِّمَ وَقْتِي، لِأَنَّ امْتِحَانَاتِي انْتَهَتْ.</a:t>
@@ -13219,6 +13328,7 @@
                   <a:srgbClr val="1B3B6F"/>
                 </a:solidFill>
                 <a:latin typeface="Amiri" pitchFamily="2" charset="-78"/>
+                <a:ea typeface="Amiri" pitchFamily="2" charset="-78"/>
                 <a:cs typeface="Amiri" pitchFamily="2" charset="-78"/>
               </a:rPr>
               <a:t>عَمَلُنَا هُنَا فِي نِهَايَةِ الأُسْبُوعِ وَبَعْضِ الأُمْسِيَاتِ.</a:t>
@@ -13322,6 +13432,7 @@
                   <a:srgbClr val="1B3B6F"/>
                 </a:solidFill>
                 <a:latin typeface="Amiri" pitchFamily="2" charset="-78"/>
+                <a:ea typeface="Amiri" pitchFamily="2" charset="-78"/>
                 <a:cs typeface="Amiri" pitchFamily="2" charset="-78"/>
               </a:rPr>
               <a:t>إِذَا غَضِبَ زَبُونٌ، فَإِنِّي أَسْتَمِعُ إِلَيْهِ بِهُدُوءٍ، ثُمَّ أَطْلُبُ المُسَاعَدَةَ مِنَ المُدِيرِ.</a:t>
@@ -13398,6 +13509,7 @@
                   <a:srgbClr val="1B3B6F"/>
                 </a:solidFill>
                 <a:latin typeface="Amiri" pitchFamily="2" charset="-78"/>
+                <a:ea typeface="Amiri" pitchFamily="2" charset="-78"/>
                 <a:cs typeface="Amiri" pitchFamily="2" charset="-78"/>
               </a:rPr>
               <a:t>مَاذَا تَفْعَلُ إِذَا غَضِبَ زَبُونٌ؟</a:t>
@@ -13607,6 +13719,7 @@
                   <a:srgbClr val="D4AF37"/>
                 </a:solidFill>
                 <a:latin typeface="Amiri" pitchFamily="2" charset="-78"/>
+                <a:ea typeface="Amiri" pitchFamily="2" charset="-78"/>
                 <a:cs typeface="Amiri" pitchFamily="2" charset="-78"/>
               </a:rPr>
               <a:t>م</a:t>
@@ -13927,6 +14040,7 @@
                   <a:srgbClr val="8A6D1E"/>
                 </a:solidFill>
                 <a:latin typeface="Amiri" pitchFamily="2" charset="-78"/>
+                <a:ea typeface="Amiri" pitchFamily="2" charset="-78"/>
                 <a:cs typeface="Amiri" pitchFamily="2" charset="-78"/>
               </a:rPr>
               <a:t>نَمُوذَجُ الإِجَابَةِ</a:t>
@@ -14169,6 +14283,7 @@
                   <a:srgbClr val="1B3B6F"/>
                 </a:solidFill>
                 <a:latin typeface="Amiri" pitchFamily="2" charset="-78"/>
+                <a:ea typeface="Amiri" pitchFamily="2" charset="-78"/>
                 <a:cs typeface="Amiri" pitchFamily="2" charset="-78"/>
               </a:rPr>
               <a:t>مِنْ نَاحِيَةٍ، يُعَلِّمُهُمُ العَمَلُ المَسْؤُولِيَّةَ وَقِيمَةَ المَالِ، وَمِنْ نَاحِيَةٍ أُخْرَى، قَدْ يُؤَثِّرُ فِي دَرَجَاتِهِمْ إِذَا كَانَتِ السَّاعَاتُ طَوِيلَةً.</a:t>
@@ -14245,6 +14360,7 @@
                   <a:srgbClr val="1B3B6F"/>
                 </a:solidFill>
                 <a:latin typeface="Amiri" pitchFamily="2" charset="-78"/>
+                <a:ea typeface="Amiri" pitchFamily="2" charset="-78"/>
                 <a:cs typeface="Amiri" pitchFamily="2" charset="-78"/>
               </a:rPr>
               <a:t>هَلْ يَنْبَغِي أَنْ يَعْمَلَ المُرَاهِقُونَ أَثْنَاءَ الدِّرَاسَةِ؟</a:t>
@@ -14348,6 +14464,7 @@
                   <a:srgbClr val="1B3B6F"/>
                 </a:solidFill>
                 <a:latin typeface="Amiri" pitchFamily="2" charset="-78"/>
+                <a:ea typeface="Amiri" pitchFamily="2" charset="-78"/>
                 <a:cs typeface="Amiri" pitchFamily="2" charset="-78"/>
               </a:rPr>
               <a:t>كُنْتُ أَعْمَلُ عِشْرِينَ سَاعَةً فِي الأُسْبُوعِ فِي مَتْجَرٍ، فَلَاحَظْتُ أَنَّ تَرْكِيزِي فِي الصَّفِّ أَصْبَحَ أَضْعَفَ، فَخَفَّضْتُهَا إِلَى ثَمَانِي سَاعَاتٍ.</a:t>
@@ -14424,6 +14541,7 @@
                   <a:srgbClr val="1B3B6F"/>
                 </a:solidFill>
                 <a:latin typeface="Amiri" pitchFamily="2" charset="-78"/>
+                <a:ea typeface="Amiri" pitchFamily="2" charset="-78"/>
                 <a:cs typeface="Amiri" pitchFamily="2" charset="-78"/>
               </a:rPr>
               <a:t>وَمَا تَجْرِبَتُكَ أَنْتَ؟</a:t>
@@ -14527,6 +14645,7 @@
                   <a:srgbClr val="1B3B6F"/>
                 </a:solidFill>
                 <a:latin typeface="Amiri" pitchFamily="2" charset="-78"/>
+                <a:ea typeface="Amiri" pitchFamily="2" charset="-78"/>
                 <a:cs typeface="Amiri" pitchFamily="2" charset="-78"/>
               </a:rPr>
               <a:t>صَحِيحٌ أَنَّ هٰذَا وَاقِعٌ، غَيْرَ أَنَّهُ يَجِبُ عَلَى أَصْحَابِ العَمَلِ أَنْ يَحْتَرِمُوا سَاعَاتِ الدِّرَاسَةِ، وَأَلَّا يَطْلُبُوا نَوْبَاتٍ لَيْلِيَّةً.</a:t>
@@ -14603,6 +14722,7 @@
                   <a:srgbClr val="1B3B6F"/>
                 </a:solidFill>
                 <a:latin typeface="Amiri" pitchFamily="2" charset="-78"/>
+                <a:ea typeface="Amiri" pitchFamily="2" charset="-78"/>
                 <a:cs typeface="Amiri" pitchFamily="2" charset="-78"/>
               </a:rPr>
               <a:t>لٰكِنَّ بَعْضَ الأُسَرِ تَحْتَاجُ إِلَى هٰذَا المَالِ.</a:t>
@@ -14706,6 +14826,7 @@
                   <a:srgbClr val="1B3B6F"/>
                 </a:solidFill>
                 <a:latin typeface="Amiri" pitchFamily="2" charset="-78"/>
+                <a:ea typeface="Amiri" pitchFamily="2" charset="-78"/>
                 <a:cs typeface="Amiri" pitchFamily="2" charset="-78"/>
               </a:rPr>
               <a:t>كَانَ كَثِيرٌ مِنَ الأَطْفَالِ يَعْمَلُونَ فِي المَصَانِعِ سَاعَاتٍ طَوِيلَةً، أَمَّا اليَوْمَ فَتَحْمِيهِمْ قَوَانِينُ تُحَدِّدُ أَعْمَارَهُمْ وَسَاعَاتِهِمْ.</a:t>
@@ -14782,6 +14903,7 @@
                   <a:srgbClr val="1B3B6F"/>
                 </a:solidFill>
                 <a:latin typeface="Amiri" pitchFamily="2" charset="-78"/>
+                <a:ea typeface="Amiri" pitchFamily="2" charset="-78"/>
                 <a:cs typeface="Amiri" pitchFamily="2" charset="-78"/>
               </a:rPr>
               <a:t>كَيْفَ كَانَتْ ظُرُوفُ العَمَلِ لِلشَّبَابِ فِي المَاضِي؟</a:t>
@@ -14885,6 +15007,7 @@
                   <a:srgbClr val="1B3B6F"/>
                 </a:solidFill>
                 <a:latin typeface="Amiri" pitchFamily="2" charset="-78"/>
+                <a:ea typeface="Amiri" pitchFamily="2" charset="-78"/>
                 <a:cs typeface="Amiri" pitchFamily="2" charset="-78"/>
               </a:rPr>
               <a:t>لَوْ كُنْتُ صَاحِبَ عَمَلٍ، لَأَعْطَيْتُ الطُّلَّابَ سَاعَاتٍ مَرِنَةً فِي فَتْرَةِ الامْتِحَانَاتِ، وَلَدَرَّبْتُهُمْ عَلَى مَهَارَاتٍ تَنْفَعُهُمْ مُسْتَقْبَلًا.</a:t>
@@ -14961,6 +15084,7 @@
                   <a:srgbClr val="1B3B6F"/>
                 </a:solidFill>
                 <a:latin typeface="Amiri" pitchFamily="2" charset="-78"/>
+                <a:ea typeface="Amiri" pitchFamily="2" charset="-78"/>
                 <a:cs typeface="Amiri" pitchFamily="2" charset="-78"/>
               </a:rPr>
               <a:t>لَوْ كُنْتَ صَاحِبَ عَمَلٍ، كَيْفَ تُعَامِلُ المُوَظَّفِينَ الشَّبَابَ؟</a:t>
@@ -15170,6 +15294,7 @@
                   <a:srgbClr val="D4AF37"/>
                 </a:solidFill>
                 <a:latin typeface="Amiri" pitchFamily="2" charset="-78"/>
+                <a:ea typeface="Amiri" pitchFamily="2" charset="-78"/>
                 <a:cs typeface="Amiri" pitchFamily="2" charset="-78"/>
               </a:rPr>
               <a:t>م</a:t>
@@ -15490,6 +15615,7 @@
                   <a:srgbClr val="8A6D1E"/>
                 </a:solidFill>
                 <a:latin typeface="Amiri" pitchFamily="2" charset="-78"/>
+                <a:ea typeface="Amiri" pitchFamily="2" charset="-78"/>
                 <a:cs typeface="Amiri" pitchFamily="2" charset="-78"/>
               </a:rPr>
               <a:t>العَمَلُ</a:t>
@@ -15770,6 +15896,7 @@
                   <a:srgbClr val="1B3B6F"/>
                 </a:solidFill>
                 <a:latin typeface="Amiri" pitchFamily="2" charset="-78"/>
+                <a:ea typeface="Amiri" pitchFamily="2" charset="-78"/>
                 <a:cs typeface="Amiri" pitchFamily="2" charset="-78"/>
               </a:rPr>
               <a:t>نَعَمْ، أَعْمَلُ فِي … / لَا، …</a:t>
@@ -15846,6 +15973,7 @@
                   <a:srgbClr val="1B3B6F"/>
                 </a:solidFill>
                 <a:latin typeface="Amiri" pitchFamily="2" charset="-78"/>
+                <a:ea typeface="Amiri" pitchFamily="2" charset="-78"/>
                 <a:cs typeface="Amiri" pitchFamily="2" charset="-78"/>
               </a:rPr>
               <a:t>هَلْ عِنْدَكَ عَمَلٌ جُزْئِيٌّ؟</a:t>
@@ -16014,6 +16142,7 @@
                   <a:srgbClr val="1B3B6F"/>
                 </a:solidFill>
                 <a:latin typeface="Amiri" pitchFamily="2" charset="-78"/>
+                <a:ea typeface="Amiri" pitchFamily="2" charset="-78"/>
                 <a:cs typeface="Amiri" pitchFamily="2" charset="-78"/>
               </a:rPr>
               <a:t>أَعْمَلُ مِنَ … إِلَى …</a:t>
@@ -16090,6 +16219,7 @@
                   <a:srgbClr val="1B3B6F"/>
                 </a:solidFill>
                 <a:latin typeface="Amiri" pitchFamily="2" charset="-78"/>
+                <a:ea typeface="Amiri" pitchFamily="2" charset="-78"/>
                 <a:cs typeface="Amiri" pitchFamily="2" charset="-78"/>
               </a:rPr>
               <a:t>مَا سَاعَاتُ عَمَلِكَ؟</a:t>
@@ -16258,6 +16388,7 @@
                   <a:srgbClr val="1B3B6F"/>
                 </a:solidFill>
                 <a:latin typeface="Amiri" pitchFamily="2" charset="-78"/>
+                <a:ea typeface="Amiri" pitchFamily="2" charset="-78"/>
                 <a:cs typeface="Amiri" pitchFamily="2" charset="-78"/>
               </a:rPr>
               <a:t>يَعْمَلُ فِي …</a:t>
@@ -16334,6 +16465,7 @@
                   <a:srgbClr val="1B3B6F"/>
                 </a:solidFill>
                 <a:latin typeface="Amiri" pitchFamily="2" charset="-78"/>
+                <a:ea typeface="Amiri" pitchFamily="2" charset="-78"/>
                 <a:cs typeface="Amiri" pitchFamily="2" charset="-78"/>
               </a:rPr>
               <a:t>أَيْنَ يَعْمَلُ وَالِدُكَ؟</a:t>
@@ -16502,6 +16634,7 @@
                   <a:srgbClr val="1B3B6F"/>
                 </a:solidFill>
                 <a:latin typeface="Amiri" pitchFamily="2" charset="-78"/>
+                <a:ea typeface="Amiri" pitchFamily="2" charset="-78"/>
                 <a:cs typeface="Amiri" pitchFamily="2" charset="-78"/>
               </a:rPr>
               <a:t>نَعَمْ / لَا، لِأَنَّ …</a:t>
@@ -16578,6 +16711,7 @@
                   <a:srgbClr val="1B3B6F"/>
                 </a:solidFill>
                 <a:latin typeface="Amiri" pitchFamily="2" charset="-78"/>
+                <a:ea typeface="Amiri" pitchFamily="2" charset="-78"/>
                 <a:cs typeface="Amiri" pitchFamily="2" charset="-78"/>
               </a:rPr>
               <a:t>هَلْ تُحِبُّ العَمَلَ فِي مَكْتَبٍ؟</a:t>
@@ -16746,6 +16880,7 @@
                   <a:srgbClr val="1B3B6F"/>
                 </a:solidFill>
                 <a:latin typeface="Amiri" pitchFamily="2" charset="-78"/>
+                <a:ea typeface="Amiri" pitchFamily="2" charset="-78"/>
                 <a:cs typeface="Amiri" pitchFamily="2" charset="-78"/>
               </a:rPr>
               <a:t>أَدَّخِرُ … / أَشْتَرِي …</a:t>
@@ -16822,6 +16957,7 @@
                   <a:srgbClr val="1B3B6F"/>
                 </a:solidFill>
                 <a:latin typeface="Amiri" pitchFamily="2" charset="-78"/>
+                <a:ea typeface="Amiri" pitchFamily="2" charset="-78"/>
                 <a:cs typeface="Amiri" pitchFamily="2" charset="-78"/>
               </a:rPr>
               <a:t>مَاذَا تَفْعَلُ بِالمَالِ؟</a:t>
@@ -16976,6 +17112,7 @@
                   <a:srgbClr val="1B3B6F"/>
                 </a:solidFill>
                 <a:latin typeface="Amiri" pitchFamily="2" charset="-78"/>
+                <a:ea typeface="Amiri" pitchFamily="2" charset="-78"/>
                 <a:cs typeface="Amiri" pitchFamily="2" charset="-78"/>
               </a:rPr>
               <a:t>عَفْوًا، هَلْ يُمْكِنُ أَنْ تُعِيدَ السُّؤَالَ؟</a:t>
@@ -17109,6 +17246,7 @@
                   <a:srgbClr val="D4AF37"/>
                 </a:solidFill>
                 <a:latin typeface="Amiri" pitchFamily="2" charset="-78"/>
+                <a:ea typeface="Amiri" pitchFamily="2" charset="-78"/>
                 <a:cs typeface="Amiri" pitchFamily="2" charset="-78"/>
               </a:rPr>
               <a:t>م</a:t>
@@ -17429,6 +17567,7 @@
                   <a:srgbClr val="8A6D1E"/>
                 </a:solidFill>
                 <a:latin typeface="Amiri" pitchFamily="2" charset="-78"/>
+                <a:ea typeface="Amiri" pitchFamily="2" charset="-78"/>
                 <a:cs typeface="Amiri" pitchFamily="2" charset="-78"/>
               </a:rPr>
               <a:t>ظُرُوفُ العَمَلِ</a:t>
@@ -17709,6 +17848,7 @@
                   <a:srgbClr val="1B3B6F"/>
                 </a:solidFill>
                 <a:latin typeface="Amiri" pitchFamily="2" charset="-78"/>
+                <a:ea typeface="Amiri" pitchFamily="2" charset="-78"/>
                 <a:cs typeface="Amiri" pitchFamily="2" charset="-78"/>
               </a:rPr>
               <a:t>كَانَ … وَكَانَ … لٰكِنَّ …</a:t>
@@ -17785,6 +17925,7 @@
                   <a:srgbClr val="1B3B6F"/>
                 </a:solidFill>
                 <a:latin typeface="Amiri" pitchFamily="2" charset="-78"/>
+                <a:ea typeface="Amiri" pitchFamily="2" charset="-78"/>
                 <a:cs typeface="Amiri" pitchFamily="2" charset="-78"/>
               </a:rPr>
               <a:t>صِفْ مَكَانَ عَمَلٍ زُرْتَهُ أَوْ عَمِلْتَ فِيهِ.</a:t>
@@ -17888,6 +18029,7 @@
                   <a:srgbClr val="1B3B6F"/>
                 </a:solidFill>
                 <a:latin typeface="Amiri" pitchFamily="2" charset="-78"/>
+                <a:ea typeface="Amiri" pitchFamily="2" charset="-78"/>
                 <a:cs typeface="Amiri" pitchFamily="2" charset="-78"/>
               </a:rPr>
               <a:t>العَمَلُ فِي … أَكْثَرُ … بَيْنَمَا …</a:t>
@@ -17964,6 +18106,7 @@
                   <a:srgbClr val="1B3B6F"/>
                 </a:solidFill>
                 <a:latin typeface="Amiri" pitchFamily="2" charset="-78"/>
+                <a:ea typeface="Amiri" pitchFamily="2" charset="-78"/>
                 <a:cs typeface="Amiri" pitchFamily="2" charset="-78"/>
               </a:rPr>
               <a:t>قَارِنْ بَيْنَ العَمَلِ فِي مَكْتَبٍ وَالعَمَلِ فِي الخَارِجِ.</a:t>
@@ -18067,6 +18210,7 @@
                   <a:srgbClr val="1B3B6F"/>
                 </a:solidFill>
                 <a:latin typeface="Amiri" pitchFamily="2" charset="-78"/>
+                <a:ea typeface="Amiri" pitchFamily="2" charset="-78"/>
                 <a:cs typeface="Amiri" pitchFamily="2" charset="-78"/>
               </a:rPr>
               <a:t>أَهَمُّ شَيْءٍ … لِأَنَّ …</a:t>
@@ -18143,6 +18287,7 @@
                   <a:srgbClr val="1B3B6F"/>
                 </a:solidFill>
                 <a:latin typeface="Amiri" pitchFamily="2" charset="-78"/>
+                <a:ea typeface="Amiri" pitchFamily="2" charset="-78"/>
                 <a:cs typeface="Amiri" pitchFamily="2" charset="-78"/>
               </a:rPr>
               <a:t>مَا أَهَمُّ شَيْءٍ فِي مَكَانِ العَمَلِ؟</a:t>
@@ -18246,6 +18391,7 @@
                   <a:srgbClr val="1B3B6F"/>
                 </a:solidFill>
                 <a:latin typeface="Amiri" pitchFamily="2" charset="-78"/>
+                <a:ea typeface="Amiri" pitchFamily="2" charset="-78"/>
                 <a:cs typeface="Amiri" pitchFamily="2" charset="-78"/>
               </a:rPr>
               <a:t>كَانَ جَدِّي يَعْمَلُ … وَكَانَ …</a:t>
@@ -18322,6 +18468,7 @@
                   <a:srgbClr val="1B3B6F"/>
                 </a:solidFill>
                 <a:latin typeface="Amiri" pitchFamily="2" charset="-78"/>
+                <a:ea typeface="Amiri" pitchFamily="2" charset="-78"/>
                 <a:cs typeface="Amiri" pitchFamily="2" charset="-78"/>
               </a:rPr>
               <a:t>كَيْفَ كَانَ عَمَلُ جَدِّكَ؟</a:t>
@@ -18425,6 +18572,7 @@
                   <a:srgbClr val="1B3B6F"/>
                 </a:solidFill>
                 <a:latin typeface="Amiri" pitchFamily="2" charset="-78"/>
+                <a:ea typeface="Amiri" pitchFamily="2" charset="-78"/>
                 <a:cs typeface="Amiri" pitchFamily="2" charset="-78"/>
               </a:rPr>
               <a:t>سَأَبْحَثُ عَنْ … لِأَنَّ …</a:t>
@@ -18501,6 +18649,7 @@
                   <a:srgbClr val="1B3B6F"/>
                 </a:solidFill>
                 <a:latin typeface="Amiri" pitchFamily="2" charset="-78"/>
+                <a:ea typeface="Amiri" pitchFamily="2" charset="-78"/>
                 <a:cs typeface="Amiri" pitchFamily="2" charset="-78"/>
               </a:rPr>
               <a:t>مَا العَمَلُ الَّذِي سَتَبْحَثُ عَنْهُ فِي الصَّيْفِ؟</a:t>
@@ -18710,6 +18859,7 @@
                   <a:srgbClr val="D4AF37"/>
                 </a:solidFill>
                 <a:latin typeface="Amiri" pitchFamily="2" charset="-78"/>
+                <a:ea typeface="Amiri" pitchFamily="2" charset="-78"/>
                 <a:cs typeface="Amiri" pitchFamily="2" charset="-78"/>
               </a:rPr>
               <a:t>م</a:t>
@@ -19030,6 +19180,7 @@
                   <a:srgbClr val="8A6D1E"/>
                 </a:solidFill>
                 <a:latin typeface="Amiri" pitchFamily="2" charset="-78"/>
+                <a:ea typeface="Amiri" pitchFamily="2" charset="-78"/>
                 <a:cs typeface="Amiri" pitchFamily="2" charset="-78"/>
               </a:rPr>
               <a:t>العَمَلُ وَالحَيَاةُ</a:t>
@@ -19310,6 +19461,7 @@
                   <a:srgbClr val="1B3B6F"/>
                 </a:solidFill>
                 <a:latin typeface="Amiri" pitchFamily="2" charset="-78"/>
+                <a:ea typeface="Amiri" pitchFamily="2" charset="-78"/>
                 <a:cs typeface="Amiri" pitchFamily="2" charset="-78"/>
               </a:rPr>
               <a:t>مِنْ نَاحِيَةٍ … وَمِنْ نَاحِيَةٍ أُخْرَى …</a:t>
@@ -19386,6 +19538,7 @@
                   <a:srgbClr val="1B3B6F"/>
                 </a:solidFill>
                 <a:latin typeface="Amiri" pitchFamily="2" charset="-78"/>
+                <a:ea typeface="Amiri" pitchFamily="2" charset="-78"/>
                 <a:cs typeface="Amiri" pitchFamily="2" charset="-78"/>
               </a:rPr>
               <a:t>هَلْ أُسْبُوعُ العَمَلِ ذُو الأَيَّامِ الأَرْبَعَةِ فِكْرَةٌ جَيِّدَةٌ؟</a:t>
@@ -19489,6 +19642,7 @@
                   <a:srgbClr val="1B3B6F"/>
                 </a:solidFill>
                 <a:latin typeface="Amiri" pitchFamily="2" charset="-78"/>
+                <a:ea typeface="Amiri" pitchFamily="2" charset="-78"/>
                 <a:cs typeface="Amiri" pitchFamily="2" charset="-78"/>
               </a:rPr>
               <a:t>صَحِيحٌ أَنَّ … غَيْرَ أَنَّ …</a:t>
@@ -19565,6 +19719,7 @@
                   <a:srgbClr val="1B3B6F"/>
                 </a:solidFill>
                 <a:latin typeface="Amiri" pitchFamily="2" charset="-78"/>
+                <a:ea typeface="Amiri" pitchFamily="2" charset="-78"/>
                 <a:cs typeface="Amiri" pitchFamily="2" charset="-78"/>
               </a:rPr>
               <a:t>أَيُّهُمَا أَهَمُّ: الرَّاتِبُ أَمْ ظُرُوفُ العَمَلِ؟</a:t>
@@ -19668,6 +19823,7 @@
                   <a:srgbClr val="1B3B6F"/>
                 </a:solidFill>
                 <a:latin typeface="Amiri" pitchFamily="2" charset="-78"/>
+                <a:ea typeface="Amiri" pitchFamily="2" charset="-78"/>
                 <a:cs typeface="Amiri" pitchFamily="2" charset="-78"/>
               </a:rPr>
               <a:t>كَانَ المُوَظَّفُونَ … أَمَّا اليَوْمَ فَيَعْمَلُ …</a:t>
@@ -19744,6 +19900,7 @@
                   <a:srgbClr val="1B3B6F"/>
                 </a:solidFill>
                 <a:latin typeface="Amiri" pitchFamily="2" charset="-78"/>
+                <a:ea typeface="Amiri" pitchFamily="2" charset="-78"/>
                 <a:cs typeface="Amiri" pitchFamily="2" charset="-78"/>
               </a:rPr>
               <a:t>كَيْفَ غَيَّرَتِ التِّكْنُولُوجْيَا أَمَاكِنَ العَمَلِ؟</a:t>
@@ -19847,6 +20004,7 @@
                   <a:srgbClr val="1B3B6F"/>
                 </a:solidFill>
                 <a:latin typeface="Amiri" pitchFamily="2" charset="-78"/>
+                <a:ea typeface="Amiri" pitchFamily="2" charset="-78"/>
                 <a:cs typeface="Amiri" pitchFamily="2" charset="-78"/>
               </a:rPr>
               <a:t>أَرَى أَنَّهُ يَجِبُ … لِأَنَّ …</a:t>
@@ -19923,6 +20081,7 @@
                   <a:srgbClr val="1B3B6F"/>
                 </a:solidFill>
                 <a:latin typeface="Amiri" pitchFamily="2" charset="-78"/>
+                <a:ea typeface="Amiri" pitchFamily="2" charset="-78"/>
                 <a:cs typeface="Amiri" pitchFamily="2" charset="-78"/>
               </a:rPr>
               <a:t>هَلْ يَجِبُ أَنْ يَحْصُلَ المُتَدَرِّبُونَ عَلَى أَجْرٍ؟</a:t>
@@ -20026,6 +20185,7 @@
                   <a:srgbClr val="1B3B6F"/>
                 </a:solidFill>
                 <a:latin typeface="Amiri" pitchFamily="2" charset="-78"/>
+                <a:ea typeface="Amiri" pitchFamily="2" charset="-78"/>
                 <a:cs typeface="Amiri" pitchFamily="2" charset="-78"/>
               </a:rPr>
               <a:t>لَوْ صَمَّمْتُهُ، لَجَعَلْتُ …</a:t>
@@ -20102,6 +20262,7 @@
                   <a:srgbClr val="1B3B6F"/>
                 </a:solidFill>
                 <a:latin typeface="Amiri" pitchFamily="2" charset="-78"/>
+                <a:ea typeface="Amiri" pitchFamily="2" charset="-78"/>
                 <a:cs typeface="Amiri" pitchFamily="2" charset="-78"/>
               </a:rPr>
               <a:t>لَوْ صَمَّمْتَ مَكَانَ العَمَلِ المِثَالِيَّ، كَيْفَ يَكُونُ؟</a:t>
@@ -20311,6 +20472,7 @@
                   <a:srgbClr val="D4AF37"/>
                 </a:solidFill>
                 <a:latin typeface="Amiri" pitchFamily="2" charset="-78"/>
+                <a:ea typeface="Amiri" pitchFamily="2" charset="-78"/>
                 <a:cs typeface="Amiri" pitchFamily="2" charset="-78"/>
               </a:rPr>
               <a:t>م</a:t>
@@ -20631,6 +20793,7 @@
                   <a:srgbClr val="8A6D1E"/>
                 </a:solidFill>
                 <a:latin typeface="Amiri" pitchFamily="2" charset="-78"/>
+                <a:ea typeface="Amiri" pitchFamily="2" charset="-78"/>
                 <a:cs typeface="Amiri" pitchFamily="2" charset="-78"/>
               </a:rPr>
               <a:t>آدَابُ الصَّفِّ</a:t>
@@ -22162,6 +22325,7 @@
                   <a:srgbClr val="D4AF37"/>
                 </a:solidFill>
                 <a:latin typeface="Amiri" pitchFamily="2" charset="-78"/>
+                <a:ea typeface="Amiri" pitchFamily="2" charset="-78"/>
                 <a:cs typeface="Amiri" pitchFamily="2" charset="-78"/>
               </a:rPr>
               <a:t>م</a:t>
@@ -22482,6 +22646,7 @@
                   <a:srgbClr val="8A6D1E"/>
                 </a:solidFill>
                 <a:latin typeface="Amiri" pitchFamily="2" charset="-78"/>
+                <a:ea typeface="Amiri" pitchFamily="2" charset="-78"/>
                 <a:cs typeface="Amiri" pitchFamily="2" charset="-78"/>
               </a:rPr>
               <a:t>نَمُوذَجُ الإِجَابَةِ</a:t>
@@ -22724,6 +22889,7 @@
                   <a:srgbClr val="1B3B6F"/>
                 </a:solidFill>
                 <a:latin typeface="Amiri" pitchFamily="2" charset="-78"/>
+                <a:ea typeface="Amiri" pitchFamily="2" charset="-78"/>
                 <a:cs typeface="Amiri" pitchFamily="2" charset="-78"/>
               </a:rPr>
               <a:t>نَعَمْ، أَعْمَلُ فِي مَخْبَزٍ يَوْمَ السَّبْتِ.</a:t>
@@ -22800,6 +22966,7 @@
                   <a:srgbClr val="1B3B6F"/>
                 </a:solidFill>
                 <a:latin typeface="Amiri" pitchFamily="2" charset="-78"/>
+                <a:ea typeface="Amiri" pitchFamily="2" charset="-78"/>
                 <a:cs typeface="Amiri" pitchFamily="2" charset="-78"/>
               </a:rPr>
               <a:t>هَلْ عِنْدَكَ عَمَلٌ جُزْئِيٌّ؟</a:t>
@@ -22903,6 +23070,7 @@
                   <a:srgbClr val="1B3B6F"/>
                 </a:solidFill>
                 <a:latin typeface="Amiri" pitchFamily="2" charset="-78"/>
+                <a:ea typeface="Amiri" pitchFamily="2" charset="-78"/>
                 <a:cs typeface="Amiri" pitchFamily="2" charset="-78"/>
               </a:rPr>
               <a:t>أَعْمَلُ مِنَ السَّاعَةِ الثَّامِنَةِ إِلَى الوَاحِدَةِ.</a:t>
@@ -22979,6 +23147,7 @@
                   <a:srgbClr val="1B3B6F"/>
                 </a:solidFill>
                 <a:latin typeface="Amiri" pitchFamily="2" charset="-78"/>
+                <a:ea typeface="Amiri" pitchFamily="2" charset="-78"/>
                 <a:cs typeface="Amiri" pitchFamily="2" charset="-78"/>
               </a:rPr>
               <a:t>مَا سَاعَاتُ عَمَلِكَ؟</a:t>
@@ -23082,6 +23251,7 @@
                   <a:srgbClr val="1B3B6F"/>
                 </a:solidFill>
                 <a:latin typeface="Amiri" pitchFamily="2" charset="-78"/>
+                <a:ea typeface="Amiri" pitchFamily="2" charset="-78"/>
                 <a:cs typeface="Amiri" pitchFamily="2" charset="-78"/>
               </a:rPr>
               <a:t>يَعْمَلُ فِي مَكْتَبٍ فِي وَسَطِ المَدِينَةِ.</a:t>
@@ -23158,6 +23328,7 @@
                   <a:srgbClr val="1B3B6F"/>
                 </a:solidFill>
                 <a:latin typeface="Amiri" pitchFamily="2" charset="-78"/>
+                <a:ea typeface="Amiri" pitchFamily="2" charset="-78"/>
                 <a:cs typeface="Amiri" pitchFamily="2" charset="-78"/>
               </a:rPr>
               <a:t>أَيْنَ يَعْمَلُ وَالِدُكَ؟</a:t>
@@ -23261,6 +23432,7 @@
                   <a:srgbClr val="1B3B6F"/>
                 </a:solidFill>
                 <a:latin typeface="Amiri" pitchFamily="2" charset="-78"/>
+                <a:ea typeface="Amiri" pitchFamily="2" charset="-78"/>
                 <a:cs typeface="Amiri" pitchFamily="2" charset="-78"/>
               </a:rPr>
               <a:t>لَا، لِأَنِّي لَا أُحِبُّ الجُلُوسَ طُولَ اليَوْمِ.</a:t>
@@ -23337,6 +23509,7 @@
                   <a:srgbClr val="1B3B6F"/>
                 </a:solidFill>
                 <a:latin typeface="Amiri" pitchFamily="2" charset="-78"/>
+                <a:ea typeface="Amiri" pitchFamily="2" charset="-78"/>
                 <a:cs typeface="Amiri" pitchFamily="2" charset="-78"/>
               </a:rPr>
               <a:t>هَلْ تُحِبُّ العَمَلَ فِي مَكْتَبٍ؟</a:t>
@@ -23440,6 +23613,7 @@
                   <a:srgbClr val="1B3B6F"/>
                 </a:solidFill>
                 <a:latin typeface="Amiri" pitchFamily="2" charset="-78"/>
+                <a:ea typeface="Amiri" pitchFamily="2" charset="-78"/>
                 <a:cs typeface="Amiri" pitchFamily="2" charset="-78"/>
               </a:rPr>
               <a:t>أَدَّخِرُ نِصْفَهُ، وَأَشْتَرِي بِالبَاقِي مَلَابِسَ.</a:t>
@@ -23516,6 +23690,7 @@
                   <a:srgbClr val="1B3B6F"/>
                 </a:solidFill>
                 <a:latin typeface="Amiri" pitchFamily="2" charset="-78"/>
+                <a:ea typeface="Amiri" pitchFamily="2" charset="-78"/>
                 <a:cs typeface="Amiri" pitchFamily="2" charset="-78"/>
               </a:rPr>
               <a:t>مَاذَا تَفْعَلُ بِالمَالِ؟</a:t>
@@ -23725,6 +23900,7 @@
                   <a:srgbClr val="D4AF37"/>
                 </a:solidFill>
                 <a:latin typeface="Amiri" pitchFamily="2" charset="-78"/>
+                <a:ea typeface="Amiri" pitchFamily="2" charset="-78"/>
                 <a:cs typeface="Amiri" pitchFamily="2" charset="-78"/>
               </a:rPr>
               <a:t>م</a:t>
@@ -24045,6 +24221,7 @@
                   <a:srgbClr val="8A6D1E"/>
                 </a:solidFill>
                 <a:latin typeface="Amiri" pitchFamily="2" charset="-78"/>
+                <a:ea typeface="Amiri" pitchFamily="2" charset="-78"/>
                 <a:cs typeface="Amiri" pitchFamily="2" charset="-78"/>
               </a:rPr>
               <a:t>نَمُوذَجُ الإِجَابَةِ</a:t>
@@ -24287,6 +24464,7 @@
                   <a:srgbClr val="1B3B6F"/>
                 </a:solidFill>
                 <a:latin typeface="Amiri" pitchFamily="2" charset="-78"/>
+                <a:ea typeface="Amiri" pitchFamily="2" charset="-78"/>
                 <a:cs typeface="Amiri" pitchFamily="2" charset="-78"/>
               </a:rPr>
               <a:t>كَانَ مَكْتَبُ أُمِّي وَاسِعًا وَحَدِيثًا، وَكَانَ المُوَظَّفُونَ يَعْمَلُونَ فِي مَجْمُوعَاتٍ، لٰكِنَّ الضَّجِيجَ كَانَ عَالِيًا.</a:t>
@@ -24363,6 +24541,7 @@
                   <a:srgbClr val="1B3B6F"/>
                 </a:solidFill>
                 <a:latin typeface="Amiri" pitchFamily="2" charset="-78"/>
+                <a:ea typeface="Amiri" pitchFamily="2" charset="-78"/>
                 <a:cs typeface="Amiri" pitchFamily="2" charset="-78"/>
               </a:rPr>
               <a:t>صِفْ مَكَانَ عَمَلٍ زُرْتَهُ أَوْ عَمِلْتَ فِيهِ.</a:t>
@@ -24466,6 +24645,7 @@
                   <a:srgbClr val="1B3B6F"/>
                 </a:solidFill>
                 <a:latin typeface="Amiri" pitchFamily="2" charset="-78"/>
+                <a:ea typeface="Amiri" pitchFamily="2" charset="-78"/>
                 <a:cs typeface="Amiri" pitchFamily="2" charset="-78"/>
               </a:rPr>
               <a:t>العَمَلُ فِي المَكْتَبِ أَكْثَرُ رَاحَةً، بَيْنَمَا العَمَلُ فِي الخَارِجِ أَكْثَرُ حَرَكَةً وَصِحَّةً، لٰكِنَّهُ صَعْبٌ فِي الشِّتَاءِ.</a:t>
@@ -24542,6 +24722,7 @@
                   <a:srgbClr val="1B3B6F"/>
                 </a:solidFill>
                 <a:latin typeface="Amiri" pitchFamily="2" charset="-78"/>
+                <a:ea typeface="Amiri" pitchFamily="2" charset="-78"/>
                 <a:cs typeface="Amiri" pitchFamily="2" charset="-78"/>
               </a:rPr>
               <a:t>قَارِنْ بَيْنَ العَمَلِ فِي مَكْتَبٍ وَالعَمَلِ فِي الخَارِجِ.</a:t>
@@ -24645,6 +24826,7 @@
                   <a:srgbClr val="1B3B6F"/>
                 </a:solidFill>
                 <a:latin typeface="Amiri" pitchFamily="2" charset="-78"/>
+                <a:ea typeface="Amiri" pitchFamily="2" charset="-78"/>
                 <a:cs typeface="Amiri" pitchFamily="2" charset="-78"/>
               </a:rPr>
               <a:t>أَهَمُّ شَيْءٍ الزُّمَلَاءُ، لِأَنَّ الجَوَّ الجَيِّدَ يَجْعَلُ السَّاعَاتِ الطَّوِيلَةَ أَقْصَرَ.</a:t>
@@ -24721,6 +24903,7 @@
                   <a:srgbClr val="1B3B6F"/>
                 </a:solidFill>
                 <a:latin typeface="Amiri" pitchFamily="2" charset="-78"/>
+                <a:ea typeface="Amiri" pitchFamily="2" charset="-78"/>
                 <a:cs typeface="Amiri" pitchFamily="2" charset="-78"/>
               </a:rPr>
               <a:t>مَا أَهَمُّ شَيْءٍ فِي مَكَانِ العَمَلِ؟</a:t>
@@ -24824,6 +25007,7 @@
                   <a:srgbClr val="1B3B6F"/>
                 </a:solidFill>
                 <a:latin typeface="Amiri" pitchFamily="2" charset="-78"/>
+                <a:ea typeface="Amiri" pitchFamily="2" charset="-78"/>
                 <a:cs typeface="Amiri" pitchFamily="2" charset="-78"/>
               </a:rPr>
               <a:t>كَانَ جَدِّي يَعْمَلُ فِي مَصْنَعٍ، وَكَانَتْ سَاعَاتُهُ طَوِيلَةً جِدًّا، وَلَمْ تَكُنْ عِنْدَهُ عُطْلَةٌ سَنَوِيَّةٌ.</a:t>
@@ -24900,6 +25084,7 @@
                   <a:srgbClr val="1B3B6F"/>
                 </a:solidFill>
                 <a:latin typeface="Amiri" pitchFamily="2" charset="-78"/>
+                <a:ea typeface="Amiri" pitchFamily="2" charset="-78"/>
                 <a:cs typeface="Amiri" pitchFamily="2" charset="-78"/>
               </a:rPr>
               <a:t>كَيْفَ كَانَ عَمَلُ جَدِّكَ؟</a:t>
@@ -25003,6 +25188,7 @@
                   <a:srgbClr val="1B3B6F"/>
                 </a:solidFill>
                 <a:latin typeface="Amiri" pitchFamily="2" charset="-78"/>
+                <a:ea typeface="Amiri" pitchFamily="2" charset="-78"/>
                 <a:cs typeface="Amiri" pitchFamily="2" charset="-78"/>
               </a:rPr>
               <a:t>سَأَبْحَثُ عَنْ عَمَلٍ فِي مُخَيَّمٍ صَيْفِيٍّ لِلْأَطْفَالِ، لِأَنِّي أُحِبُّ الرِّيَاضَةَ وَالعَمَلَ فِي الهَوَاءِ الطَّلْقِ.</a:t>
@@ -25079,6 +25265,7 @@
                   <a:srgbClr val="1B3B6F"/>
                 </a:solidFill>
                 <a:latin typeface="Amiri" pitchFamily="2" charset="-78"/>
+                <a:ea typeface="Amiri" pitchFamily="2" charset="-78"/>
                 <a:cs typeface="Amiri" pitchFamily="2" charset="-78"/>
               </a:rPr>
               <a:t>مَا العَمَلُ الَّذِي سَتَبْحَثُ عَنْهُ فِي الصَّيْفِ؟</a:t>
@@ -25288,6 +25475,7 @@
                   <a:srgbClr val="D4AF37"/>
                 </a:solidFill>
                 <a:latin typeface="Amiri" pitchFamily="2" charset="-78"/>
+                <a:ea typeface="Amiri" pitchFamily="2" charset="-78"/>
                 <a:cs typeface="Amiri" pitchFamily="2" charset="-78"/>
               </a:rPr>
               <a:t>م</a:t>
@@ -25608,6 +25796,7 @@
                   <a:srgbClr val="8A6D1E"/>
                 </a:solidFill>
                 <a:latin typeface="Amiri" pitchFamily="2" charset="-78"/>
+                <a:ea typeface="Amiri" pitchFamily="2" charset="-78"/>
                 <a:cs typeface="Amiri" pitchFamily="2" charset="-78"/>
               </a:rPr>
               <a:t>نَمُوذَجُ الإِجَابَةِ</a:t>
@@ -25850,6 +26039,7 @@
                   <a:srgbClr val="1B3B6F"/>
                 </a:solidFill>
                 <a:latin typeface="Amiri" pitchFamily="2" charset="-78"/>
+                <a:ea typeface="Amiri" pitchFamily="2" charset="-78"/>
                 <a:cs typeface="Amiri" pitchFamily="2" charset="-78"/>
               </a:rPr>
               <a:t>مِنْ نَاحِيَةٍ، يُعْطِي المُوَظَّفِينَ وَقْتًا أَطْوَلَ مَعَ أُسَرِهِمْ، وَمِنْ نَاحِيَةٍ أُخْرَى، قَدْ لَا يُنَاسِبُ المُسْتَشْفَيَاتِ وَالمَدَارِسَ.</a:t>
@@ -25929,6 +26119,7 @@
                   <a:srgbClr val="1B3B6F"/>
                 </a:solidFill>
                 <a:latin typeface="Amiri" pitchFamily="2" charset="-78"/>
+                <a:ea typeface="Amiri" pitchFamily="2" charset="-78"/>
                 <a:cs typeface="Amiri" pitchFamily="2" charset="-78"/>
               </a:rPr>
               <a:t>هَلْ أُسْبُوعُ العَمَلِ ذُو الأَيَّامِ الأَرْبَعَةِ فِكْرَةٌ جَيِّدَةٌ؟</a:t>
@@ -26032,6 +26223,7 @@
                   <a:srgbClr val="1B3B6F"/>
                 </a:solidFill>
                 <a:latin typeface="Amiri" pitchFamily="2" charset="-78"/>
+                <a:ea typeface="Amiri" pitchFamily="2" charset="-78"/>
                 <a:cs typeface="Amiri" pitchFamily="2" charset="-78"/>
               </a:rPr>
               <a:t>صَحِيحٌ أَنَّ الرَّاتِبَ ضَرُورِيٌّ، غَيْرَ أَنَّ مُدِيرًا ظَالِمًا أَوْ مَكَانًا خَطِيرًا يَجْعَلُ أَيَّ رَاتِبٍ غَيْرَ كَافٍ.</a:t>
@@ -26108,6 +26300,7 @@
                   <a:srgbClr val="1B3B6F"/>
                 </a:solidFill>
                 <a:latin typeface="Amiri" pitchFamily="2" charset="-78"/>
+                <a:ea typeface="Amiri" pitchFamily="2" charset="-78"/>
                 <a:cs typeface="Amiri" pitchFamily="2" charset="-78"/>
               </a:rPr>
               <a:t>أَيُّهُمَا أَهَمُّ: الرَّاتِبُ أَمْ ظُرُوفُ العَمَلِ؟</a:t>
@@ -26211,6 +26404,7 @@
                   <a:srgbClr val="1B3B6F"/>
                 </a:solidFill>
                 <a:latin typeface="Amiri" pitchFamily="2" charset="-78"/>
+                <a:ea typeface="Amiri" pitchFamily="2" charset="-78"/>
                 <a:cs typeface="Amiri" pitchFamily="2" charset="-78"/>
               </a:rPr>
               <a:t>كَانَ المُوَظَّفُونَ يَذْهَبُونَ إِلَى المَكْتَبِ كُلَّ يَوْمٍ، أَمَّا اليَوْمَ فَيَعْمَلُ كَثِيرٌ مِنْهُمْ مِنَ البَيْتِ يَوْمَيْنِ فِي الأُسْبُوعِ.</a:t>
@@ -26287,6 +26481,7 @@
                   <a:srgbClr val="1B3B6F"/>
                 </a:solidFill>
                 <a:latin typeface="Amiri" pitchFamily="2" charset="-78"/>
+                <a:ea typeface="Amiri" pitchFamily="2" charset="-78"/>
                 <a:cs typeface="Amiri" pitchFamily="2" charset="-78"/>
               </a:rPr>
               <a:t>كَيْفَ غَيَّرَتِ التِّكْنُولُوجْيَا أَمَاكِنَ العَمَلِ؟</a:t>
@@ -26496,6 +26691,7 @@
                   <a:srgbClr val="D4AF37"/>
                 </a:solidFill>
                 <a:latin typeface="Amiri" pitchFamily="2" charset="-78"/>
+                <a:ea typeface="Amiri" pitchFamily="2" charset="-78"/>
                 <a:cs typeface="Amiri" pitchFamily="2" charset="-78"/>
               </a:rPr>
               <a:t>م</a:t>
@@ -26816,6 +27012,7 @@
                   <a:srgbClr val="8A6D1E"/>
                 </a:solidFill>
                 <a:latin typeface="Amiri" pitchFamily="2" charset="-78"/>
+                <a:ea typeface="Amiri" pitchFamily="2" charset="-78"/>
                 <a:cs typeface="Amiri" pitchFamily="2" charset="-78"/>
               </a:rPr>
               <a:t>نَمُوذَجُ الإِجَابَةِ</a:t>
@@ -27058,6 +27255,7 @@
                   <a:srgbClr val="1B3B6F"/>
                 </a:solidFill>
                 <a:latin typeface="Amiri" pitchFamily="2" charset="-78"/>
+                <a:ea typeface="Amiri" pitchFamily="2" charset="-78"/>
                 <a:cs typeface="Amiri" pitchFamily="2" charset="-78"/>
               </a:rPr>
               <a:t>أَرَى أَنَّهُ يَجِبُ ذٰلِكَ، لِأَنَّ التَّدْرِيبَ غَيْرَ المَدْفُوعِ لَا يَسْتَطِيعُهُ إِلَّا الأَغْنِيَاءُ، مِمَّا يُقَلِّلُ الفُرَصَ لِلْآخَرِينَ.</a:t>
@@ -27134,6 +27332,7 @@
                   <a:srgbClr val="1B3B6F"/>
                 </a:solidFill>
                 <a:latin typeface="Amiri" pitchFamily="2" charset="-78"/>
+                <a:ea typeface="Amiri" pitchFamily="2" charset="-78"/>
                 <a:cs typeface="Amiri" pitchFamily="2" charset="-78"/>
               </a:rPr>
               <a:t>هَلْ يَجِبُ أَنْ يَحْصُلَ المُتَدَرِّبُونَ عَلَى أَجْرٍ؟</a:t>
@@ -27237,6 +27436,7 @@
                   <a:srgbClr val="1B3B6F"/>
                 </a:solidFill>
                 <a:latin typeface="Amiri" pitchFamily="2" charset="-78"/>
+                <a:ea typeface="Amiri" pitchFamily="2" charset="-78"/>
                 <a:cs typeface="Amiri" pitchFamily="2" charset="-78"/>
               </a:rPr>
               <a:t>لَوْ صَمَّمْتُهُ، لَجَعَلْتُ فِيهِ حَدِيقَةً وَغُرْفَةً لِلرَّاحَةِ، وَلَسَمَحْتُ لِلْمُوَظَّفِينَ بِاخْتِيَارِ سَاعَاتِهِمْ.</a:t>
@@ -27313,6 +27513,7 @@
                   <a:srgbClr val="1B3B6F"/>
                 </a:solidFill>
                 <a:latin typeface="Amiri" pitchFamily="2" charset="-78"/>
+                <a:ea typeface="Amiri" pitchFamily="2" charset="-78"/>
                 <a:cs typeface="Amiri" pitchFamily="2" charset="-78"/>
               </a:rPr>
               <a:t>لَوْ صَمَّمْتَ مَكَانَ العَمَلِ المِثَالِيَّ، كَيْفَ يَكُونُ؟</a:t>
@@ -27522,6 +27723,7 @@
                   <a:srgbClr val="D4AF37"/>
                 </a:solidFill>
                 <a:latin typeface="Amiri" pitchFamily="2" charset="-78"/>
+                <a:ea typeface="Amiri" pitchFamily="2" charset="-78"/>
                 <a:cs typeface="Amiri" pitchFamily="2" charset="-78"/>
               </a:rPr>
               <a:t>م</a:t>
@@ -27842,6 +28044,7 @@
                   <a:srgbClr val="8A6D1E"/>
                 </a:solidFill>
                 <a:latin typeface="Amiri" pitchFamily="2" charset="-78"/>
+                <a:ea typeface="Amiri" pitchFamily="2" charset="-78"/>
                 <a:cs typeface="Amiri" pitchFamily="2" charset="-78"/>
               </a:rPr>
               <a:t>قَيِّمْ عَمَلَكَ</a:t>
@@ -29086,6 +29289,7 @@
                   <a:srgbClr val="FFFFFF"/>
                 </a:solidFill>
                 <a:latin typeface="Amiri" pitchFamily="2" charset="-78"/>
+                <a:ea typeface="Amiri" pitchFamily="2" charset="-78"/>
                 <a:cs typeface="Amiri" pitchFamily="2" charset="-78"/>
               </a:rPr>
               <a:t>أَحْسَنْتُمْ! إِلَى اللِّقَاءِ</a:t>
@@ -29238,6 +29442,7 @@
                   <a:srgbClr val="D4AF37"/>
                 </a:solidFill>
                 <a:latin typeface="Amiri" pitchFamily="2" charset="-78"/>
+                <a:ea typeface="Amiri" pitchFamily="2" charset="-78"/>
                 <a:cs typeface="Amiri" pitchFamily="2" charset="-78"/>
               </a:rPr>
               <a:t>وَرْشَةُ الكِتَابَةِ</a:t>
@@ -29371,6 +29576,7 @@
                   <a:srgbClr val="D4AF37"/>
                 </a:solidFill>
                 <a:latin typeface="Amiri" pitchFamily="2" charset="-78"/>
+                <a:ea typeface="Amiri" pitchFamily="2" charset="-78"/>
                 <a:cs typeface="Amiri" pitchFamily="2" charset="-78"/>
               </a:rPr>
               <a:t>م</a:t>
@@ -29691,6 +29897,7 @@
                   <a:srgbClr val="8A6D1E"/>
                 </a:solidFill>
                 <a:latin typeface="Amiri" pitchFamily="2" charset="-78"/>
+                <a:ea typeface="Amiri" pitchFamily="2" charset="-78"/>
                 <a:cs typeface="Amiri" pitchFamily="2" charset="-78"/>
               </a:rPr>
               <a:t>خَرِيطَةُ الوَرْشَةِ</a:t>
@@ -30005,6 +30212,7 @@
                   <a:srgbClr val="1B3B6F"/>
                 </a:solidFill>
                 <a:latin typeface="Amiri" pitchFamily="2" charset="-78"/>
+                <a:ea typeface="Amiri" pitchFamily="2" charset="-78"/>
                 <a:cs typeface="Amiri" pitchFamily="2" charset="-78"/>
               </a:rPr>
               <a:t>كَيْفَ</a:t>
@@ -30281,6 +30489,7 @@
                   <a:srgbClr val="1E6B52"/>
                 </a:solidFill>
                 <a:latin typeface="Amiri" pitchFamily="2" charset="-78"/>
+                <a:ea typeface="Amiri" pitchFamily="2" charset="-78"/>
                 <a:cs typeface="Amiri" pitchFamily="2" charset="-78"/>
               </a:rPr>
               <a:t>تَمْثِيلُ الدَّوْرِ</a:t>
@@ -30557,6 +30766,7 @@
                   <a:srgbClr val="8A6D1E"/>
                 </a:solidFill>
                 <a:latin typeface="Amiri" pitchFamily="2" charset="-78"/>
+                <a:ea typeface="Amiri" pitchFamily="2" charset="-78"/>
                 <a:cs typeface="Amiri" pitchFamily="2" charset="-78"/>
               </a:rPr>
               <a:t>النَّمُوذَجُ</a:t>
@@ -30833,6 +31043,7 @@
                   <a:srgbClr val="1E6B52"/>
                 </a:solidFill>
                 <a:latin typeface="Amiri" pitchFamily="2" charset="-78"/>
+                <a:ea typeface="Amiri" pitchFamily="2" charset="-78"/>
                 <a:cs typeface="Amiri" pitchFamily="2" charset="-78"/>
               </a:rPr>
               <a:t>المُحَادَثَةُ</a:t>
@@ -31109,6 +31320,7 @@
                   <a:srgbClr val="8A6D1E"/>
                 </a:solidFill>
                 <a:latin typeface="Amiri" pitchFamily="2" charset="-78"/>
+                <a:ea typeface="Amiri" pitchFamily="2" charset="-78"/>
                 <a:cs typeface="Amiri" pitchFamily="2" charset="-78"/>
               </a:rPr>
               <a:t>قَيِّمْ</a:t>
@@ -31352,6 +31564,7 @@
                   <a:srgbClr val="D4AF37"/>
                 </a:solidFill>
                 <a:latin typeface="Amiri" pitchFamily="2" charset="-78"/>
+                <a:ea typeface="Amiri" pitchFamily="2" charset="-78"/>
                 <a:cs typeface="Amiri" pitchFamily="2" charset="-78"/>
               </a:rPr>
               <a:t>م</a:t>
@@ -31672,6 +31885,7 @@
                   <a:srgbClr val="8A6D1E"/>
                 </a:solidFill>
                 <a:latin typeface="Amiri" pitchFamily="2" charset="-78"/>
+                <a:ea typeface="Amiri" pitchFamily="2" charset="-78"/>
                 <a:cs typeface="Amiri" pitchFamily="2" charset="-78"/>
               </a:rPr>
               <a:t>امْتِحَانُ التَّحَدُّثِ</a:t>
@@ -32296,6 +32510,7 @@
                   <a:srgbClr val="1B3B6F"/>
                 </a:solidFill>
                 <a:latin typeface="Amiri" pitchFamily="2" charset="-78"/>
+                <a:ea typeface="Amiri" pitchFamily="2" charset="-78"/>
                 <a:cs typeface="Amiri" pitchFamily="2" charset="-78"/>
               </a:rPr>
               <a:t>عَفْوًا، هَلْ يُمْكِنُ أَنْ تُعِيدَ السُّؤَالَ؟</a:t>
@@ -32395,6 +32610,7 @@
                   <a:srgbClr val="1B3B6F"/>
                 </a:solidFill>
                 <a:latin typeface="Amiri" pitchFamily="2" charset="-78"/>
+                <a:ea typeface="Amiri" pitchFamily="2" charset="-78"/>
                 <a:cs typeface="Amiri" pitchFamily="2" charset="-78"/>
               </a:rPr>
               <a:t>لَحْظَةً، دَعْنِي أُفَكِّرُ …</a:t>
@@ -32494,6 +32710,7 @@
                   <a:srgbClr val="1B3B6F"/>
                 </a:solidFill>
                 <a:latin typeface="Amiri" pitchFamily="2" charset="-78"/>
+                <a:ea typeface="Amiri" pitchFamily="2" charset="-78"/>
                 <a:cs typeface="Amiri" pitchFamily="2" charset="-78"/>
               </a:rPr>
               <a:t>أَقْصِدُ …</a:t>
@@ -32665,6 +32882,7 @@
                   <a:srgbClr val="D4AF37"/>
                 </a:solidFill>
                 <a:latin typeface="Amiri" pitchFamily="2" charset="-78"/>
+                <a:ea typeface="Amiri" pitchFamily="2" charset="-78"/>
                 <a:cs typeface="Amiri" pitchFamily="2" charset="-78"/>
               </a:rPr>
               <a:t>م</a:t>
@@ -32985,6 +33203,7 @@
                   <a:srgbClr val="8A6D1E"/>
                 </a:solidFill>
                 <a:latin typeface="Amiri" pitchFamily="2" charset="-78"/>
+                <a:ea typeface="Amiri" pitchFamily="2" charset="-78"/>
                 <a:cs typeface="Amiri" pitchFamily="2" charset="-78"/>
               </a:rPr>
               <a:t>مَكَانُ العَمَلِ</a:t>
@@ -33288,6 +33507,7 @@
                   <a:srgbClr val="1B3B6F"/>
                 </a:solidFill>
                 <a:latin typeface="Amiri" pitchFamily="2" charset="-78"/>
+                <a:ea typeface="Amiri" pitchFamily="2" charset="-78"/>
                 <a:cs typeface="Amiri" pitchFamily="2" charset="-78"/>
               </a:rPr>
               <a:t>مَكْتَبٌ</a:t>
@@ -33445,6 +33665,7 @@
                   <a:srgbClr val="1B3B6F"/>
                 </a:solidFill>
                 <a:latin typeface="Amiri" pitchFamily="2" charset="-78"/>
+                <a:ea typeface="Amiri" pitchFamily="2" charset="-78"/>
                 <a:cs typeface="Amiri" pitchFamily="2" charset="-78"/>
               </a:rPr>
               <a:t>مَحَلٌّ · مَحَلَّاتٌ</a:t>
@@ -33548,6 +33769,7 @@
                   <a:srgbClr val="1B3B6F"/>
                 </a:solidFill>
                 <a:latin typeface="Amiri" pitchFamily="2" charset="-78"/>
+                <a:ea typeface="Amiri" pitchFamily="2" charset="-78"/>
                 <a:cs typeface="Amiri" pitchFamily="2" charset="-78"/>
               </a:rPr>
               <a:t>مَصْنَعٌ · مَصَانِعُ</a:t>
@@ -33651,6 +33873,7 @@
                   <a:srgbClr val="1B3B6F"/>
                 </a:solidFill>
                 <a:latin typeface="Amiri" pitchFamily="2" charset="-78"/>
+                <a:ea typeface="Amiri" pitchFamily="2" charset="-78"/>
                 <a:cs typeface="Amiri" pitchFamily="2" charset="-78"/>
               </a:rPr>
               <a:t>مَكَاتِبُ</a:t>
@@ -33916,6 +34139,7 @@
                   <a:srgbClr val="1B3B6F"/>
                 </a:solidFill>
                 <a:latin typeface="Amiri" pitchFamily="2" charset="-78"/>
+                <a:ea typeface="Amiri" pitchFamily="2" charset="-78"/>
                 <a:cs typeface="Amiri" pitchFamily="2" charset="-78"/>
               </a:rPr>
               <a:t>عَمَلٌ جُزْئِيٌّ</a:t>
@@ -34073,6 +34297,7 @@
                   <a:srgbClr val="1B3B6F"/>
                 </a:solidFill>
                 <a:latin typeface="Amiri" pitchFamily="2" charset="-78"/>
+                <a:ea typeface="Amiri" pitchFamily="2" charset="-78"/>
                 <a:cs typeface="Amiri" pitchFamily="2" charset="-78"/>
               </a:rPr>
               <a:t>نَوْبَةٌ · نَوْبَاتٌ</a:t>
@@ -34176,6 +34401,7 @@
                   <a:srgbClr val="1B3B6F"/>
                 </a:solidFill>
                 <a:latin typeface="Amiri" pitchFamily="2" charset="-78"/>
+                <a:ea typeface="Amiri" pitchFamily="2" charset="-78"/>
                 <a:cs typeface="Amiri" pitchFamily="2" charset="-78"/>
               </a:rPr>
               <a:t>عَمَلٌ بِدَوَامٍ كَامِلٍ</a:t>
@@ -34441,6 +34667,7 @@
                   <a:srgbClr val="1B3B6F"/>
                 </a:solidFill>
                 <a:latin typeface="Amiri" pitchFamily="2" charset="-78"/>
+                <a:ea typeface="Amiri" pitchFamily="2" charset="-78"/>
                 <a:cs typeface="Amiri" pitchFamily="2" charset="-78"/>
               </a:rPr>
               <a:t>سَاعَاتُ العَمَلِ</a:t>
@@ -34598,6 +34825,7 @@
                   <a:srgbClr val="1B3B6F"/>
                 </a:solidFill>
                 <a:latin typeface="Amiri" pitchFamily="2" charset="-78"/>
+                <a:ea typeface="Amiri" pitchFamily="2" charset="-78"/>
                 <a:cs typeface="Amiri" pitchFamily="2" charset="-78"/>
               </a:rPr>
               <a:t>سَاعَاتٌ إِضَافِيَّةٌ</a:t>
@@ -34701,6 +34929,7 @@
                   <a:srgbClr val="1B3B6F"/>
                 </a:solidFill>
                 <a:latin typeface="Amiri" pitchFamily="2" charset="-78"/>
+                <a:ea typeface="Amiri" pitchFamily="2" charset="-78"/>
                 <a:cs typeface="Amiri" pitchFamily="2" charset="-78"/>
               </a:rPr>
               <a:t>مِنَ … إِلَى …</a:t>
@@ -34966,6 +35195,7 @@
                   <a:srgbClr val="1B3B6F"/>
                 </a:solidFill>
                 <a:latin typeface="Amiri" pitchFamily="2" charset="-78"/>
+                <a:ea typeface="Amiri" pitchFamily="2" charset="-78"/>
                 <a:cs typeface="Amiri" pitchFamily="2" charset="-78"/>
               </a:rPr>
               <a:t>رَاتِبٌ · أَجْرٌ</a:t>
@@ -35123,6 +35353,7 @@
                   <a:srgbClr val="1B3B6F"/>
                 </a:solidFill>
                 <a:latin typeface="Amiri" pitchFamily="2" charset="-78"/>
+                <a:ea typeface="Amiri" pitchFamily="2" charset="-78"/>
                 <a:cs typeface="Amiri" pitchFamily="2" charset="-78"/>
               </a:rPr>
               <a:t>رَوَاتِبُ · أُجُورٌ</a:t>
@@ -35226,6 +35457,7 @@
                   <a:srgbClr val="1B3B6F"/>
                 </a:solidFill>
                 <a:latin typeface="Amiri" pitchFamily="2" charset="-78"/>
+                <a:ea typeface="Amiri" pitchFamily="2" charset="-78"/>
                 <a:cs typeface="Amiri" pitchFamily="2" charset="-78"/>
               </a:rPr>
               <a:t>فِي السَّاعَةِ</a:t>
@@ -35491,6 +35723,7 @@
                   <a:srgbClr val="1B3B6F"/>
                 </a:solidFill>
                 <a:latin typeface="Amiri" pitchFamily="2" charset="-78"/>
+                <a:ea typeface="Amiri" pitchFamily="2" charset="-78"/>
                 <a:cs typeface="Amiri" pitchFamily="2" charset="-78"/>
               </a:rPr>
               <a:t>زَمِيلٌ</a:t>
@@ -35648,6 +35881,7 @@
                   <a:srgbClr val="1B3B6F"/>
                 </a:solidFill>
                 <a:latin typeface="Amiri" pitchFamily="2" charset="-78"/>
+                <a:ea typeface="Amiri" pitchFamily="2" charset="-78"/>
                 <a:cs typeface="Amiri" pitchFamily="2" charset="-78"/>
               </a:rPr>
               <a:t>زُمَلَاءُ · زَمِيلَاتٌ</a:t>
@@ -35751,6 +35985,7 @@
                   <a:srgbClr val="1B3B6F"/>
                 </a:solidFill>
                 <a:latin typeface="Amiri" pitchFamily="2" charset="-78"/>
+                <a:ea typeface="Amiri" pitchFamily="2" charset="-78"/>
                 <a:cs typeface="Amiri" pitchFamily="2" charset="-78"/>
               </a:rPr>
               <a:t>زَمِيلَةٌ</a:t>
@@ -36016,6 +36251,7 @@
                   <a:srgbClr val="1B3B6F"/>
                 </a:solidFill>
                 <a:latin typeface="Amiri" pitchFamily="2" charset="-78"/>
+                <a:ea typeface="Amiri" pitchFamily="2" charset="-78"/>
                 <a:cs typeface="Amiri" pitchFamily="2" charset="-78"/>
               </a:rPr>
               <a:t>مُدِيرٌ</a:t>
@@ -36173,6 +36409,7 @@
                   <a:srgbClr val="1B3B6F"/>
                 </a:solidFill>
                 <a:latin typeface="Amiri" pitchFamily="2" charset="-78"/>
+                <a:ea typeface="Amiri" pitchFamily="2" charset="-78"/>
                 <a:cs typeface="Amiri" pitchFamily="2" charset="-78"/>
               </a:rPr>
               <a:t>مُدَرَاءُ · مُدِيرُونَ</a:t>
@@ -36276,6 +36513,7 @@
                   <a:srgbClr val="1B3B6F"/>
                 </a:solidFill>
                 <a:latin typeface="Amiri" pitchFamily="2" charset="-78"/>
+                <a:ea typeface="Amiri" pitchFamily="2" charset="-78"/>
                 <a:cs typeface="Amiri" pitchFamily="2" charset="-78"/>
               </a:rPr>
               <a:t>مُدِيرَةٌ</a:t>
@@ -36409,6 +36647,7 @@
                   <a:srgbClr val="D4AF37"/>
                 </a:solidFill>
                 <a:latin typeface="Amiri" pitchFamily="2" charset="-78"/>
+                <a:ea typeface="Amiri" pitchFamily="2" charset="-78"/>
                 <a:cs typeface="Amiri" pitchFamily="2" charset="-78"/>
               </a:rPr>
               <a:t>م</a:t>
@@ -36729,6 +36968,7 @@
                   <a:srgbClr val="8A6D1E"/>
                 </a:solidFill>
                 <a:latin typeface="Amiri" pitchFamily="2" charset="-78"/>
+                <a:ea typeface="Amiri" pitchFamily="2" charset="-78"/>
                 <a:cs typeface="Amiri" pitchFamily="2" charset="-78"/>
               </a:rPr>
               <a:t>المُقَارَنَةُ وَالمَاضِي</a:t>
@@ -37032,6 +37272,7 @@
                   <a:srgbClr val="1B3B6F"/>
                 </a:solidFill>
                 <a:latin typeface="Amiri" pitchFamily="2" charset="-78"/>
+                <a:ea typeface="Amiri" pitchFamily="2" charset="-78"/>
                 <a:cs typeface="Amiri" pitchFamily="2" charset="-78"/>
               </a:rPr>
               <a:t>زَبُونٌ</a:t>
@@ -37189,6 +37430,7 @@
                   <a:srgbClr val="1B3B6F"/>
                 </a:solidFill>
                 <a:latin typeface="Amiri" pitchFamily="2" charset="-78"/>
+                <a:ea typeface="Amiri" pitchFamily="2" charset="-78"/>
                 <a:cs typeface="Amiri" pitchFamily="2" charset="-78"/>
               </a:rPr>
               <a:t>زَبَائِنُ</a:t>
@@ -37292,6 +37534,7 @@
                   <a:srgbClr val="1B3B6F"/>
                 </a:solidFill>
                 <a:latin typeface="Amiri" pitchFamily="2" charset="-78"/>
+                <a:ea typeface="Amiri" pitchFamily="2" charset="-78"/>
                 <a:cs typeface="Amiri" pitchFamily="2" charset="-78"/>
               </a:rPr>
               <a:t>زَبُونَةٌ</a:t>
@@ -37557,6 +37800,7 @@
                   <a:srgbClr val="1B3B6F"/>
                 </a:solidFill>
                 <a:latin typeface="Amiri" pitchFamily="2" charset="-78"/>
+                <a:ea typeface="Amiri" pitchFamily="2" charset="-78"/>
                 <a:cs typeface="Amiri" pitchFamily="2" charset="-78"/>
               </a:rPr>
               <a:t>عُطْلَةٌ</a:t>
@@ -37714,6 +37958,7 @@
                   <a:srgbClr val="1B3B6F"/>
                 </a:solidFill>
                 <a:latin typeface="Amiri" pitchFamily="2" charset="-78"/>
+                <a:ea typeface="Amiri" pitchFamily="2" charset="-78"/>
                 <a:cs typeface="Amiri" pitchFamily="2" charset="-78"/>
               </a:rPr>
               <a:t>إِجَازَةٌ سَنَوِيَّةٌ</a:t>
@@ -37817,6 +38062,7 @@
                   <a:srgbClr val="1B3B6F"/>
                 </a:solidFill>
                 <a:latin typeface="Amiri" pitchFamily="2" charset="-78"/>
+                <a:ea typeface="Amiri" pitchFamily="2" charset="-78"/>
                 <a:cs typeface="Amiri" pitchFamily="2" charset="-78"/>
               </a:rPr>
               <a:t>عُطَلٌ</a:t>
@@ -38082,6 +38328,7 @@
                   <a:srgbClr val="1B3B6F"/>
                 </a:solidFill>
                 <a:latin typeface="Amiri" pitchFamily="2" charset="-78"/>
+                <a:ea typeface="Amiri" pitchFamily="2" charset="-78"/>
                 <a:cs typeface="Amiri" pitchFamily="2" charset="-78"/>
               </a:rPr>
               <a:t>ظُرُوفُ العَمَلِ</a:t>
@@ -38239,6 +38486,7 @@
                   <a:srgbClr val="1B3B6F"/>
                 </a:solidFill>
                 <a:latin typeface="Amiri" pitchFamily="2" charset="-78"/>
+                <a:ea typeface="Amiri" pitchFamily="2" charset="-78"/>
                 <a:cs typeface="Amiri" pitchFamily="2" charset="-78"/>
               </a:rPr>
               <a:t>آمِنَةٌ</a:t>
@@ -38342,6 +38590,7 @@
                   <a:srgbClr val="1B3B6F"/>
                 </a:solidFill>
                 <a:latin typeface="Amiri" pitchFamily="2" charset="-78"/>
+                <a:ea typeface="Amiri" pitchFamily="2" charset="-78"/>
                 <a:cs typeface="Amiri" pitchFamily="2" charset="-78"/>
               </a:rPr>
               <a:t>جَيِّدَةٌ · سَيِّئَةٌ</a:t>
@@ -38607,6 +38856,7 @@
                   <a:srgbClr val="1B3B6F"/>
                 </a:solidFill>
                 <a:latin typeface="Amiri" pitchFamily="2" charset="-78"/>
+                <a:ea typeface="Amiri" pitchFamily="2" charset="-78"/>
                 <a:cs typeface="Amiri" pitchFamily="2" charset="-78"/>
               </a:rPr>
               <a:t>مَرَّتَيْنِ فِي الأُسْبُوعِ</a:t>
@@ -38764,6 +39014,7 @@
                   <a:srgbClr val="1B3B6F"/>
                 </a:solidFill>
                 <a:latin typeface="Amiri" pitchFamily="2" charset="-78"/>
+                <a:ea typeface="Amiri" pitchFamily="2" charset="-78"/>
                 <a:cs typeface="Amiri" pitchFamily="2" charset="-78"/>
               </a:rPr>
               <a:t>فِي نِهَايَةِ الأُسْبُوعِ</a:t>
@@ -38867,6 +39118,7 @@
                   <a:srgbClr val="1B3B6F"/>
                 </a:solidFill>
                 <a:latin typeface="Amiri" pitchFamily="2" charset="-78"/>
+                <a:ea typeface="Amiri" pitchFamily="2" charset="-78"/>
                 <a:cs typeface="Amiri" pitchFamily="2" charset="-78"/>
               </a:rPr>
               <a:t>مَرَّةً فِي الشَّهْرِ</a:t>
@@ -39132,6 +39384,7 @@
                   <a:srgbClr val="1B3B6F"/>
                 </a:solidFill>
                 <a:latin typeface="Amiri" pitchFamily="2" charset="-78"/>
+                <a:ea typeface="Amiri" pitchFamily="2" charset="-78"/>
                 <a:cs typeface="Amiri" pitchFamily="2" charset="-78"/>
               </a:rPr>
               <a:t>أَطْوَلُ · أَقْصَرُ مِنْ</a:t>
@@ -39289,6 +39542,7 @@
                   <a:srgbClr val="1B3B6F"/>
                 </a:solidFill>
                 <a:latin typeface="Amiri" pitchFamily="2" charset="-78"/>
+                <a:ea typeface="Amiri" pitchFamily="2" charset="-78"/>
                 <a:cs typeface="Amiri" pitchFamily="2" charset="-78"/>
               </a:rPr>
               <a:t>أَعْلَى أَجْرًا</a:t>
@@ -39392,6 +39646,7 @@
                   <a:srgbClr val="1B3B6F"/>
                 </a:solidFill>
                 <a:latin typeface="Amiri" pitchFamily="2" charset="-78"/>
+                <a:ea typeface="Amiri" pitchFamily="2" charset="-78"/>
                 <a:cs typeface="Amiri" pitchFamily="2" charset="-78"/>
               </a:rPr>
               <a:t>أَكْثَرُ رَاحَةً</a:t>
@@ -39657,6 +39912,7 @@
                   <a:srgbClr val="1B3B6F"/>
                 </a:solidFill>
                 <a:latin typeface="Amiri" pitchFamily="2" charset="-78"/>
+                <a:ea typeface="Amiri" pitchFamily="2" charset="-78"/>
                 <a:cs typeface="Amiri" pitchFamily="2" charset="-78"/>
               </a:rPr>
               <a:t>كُنْتُ أَعْمَلُ</a:t>
@@ -39814,6 +40070,7 @@
                   <a:srgbClr val="1B3B6F"/>
                 </a:solidFill>
                 <a:latin typeface="Amiri" pitchFamily="2" charset="-78"/>
+                <a:ea typeface="Amiri" pitchFamily="2" charset="-78"/>
                 <a:cs typeface="Amiri" pitchFamily="2" charset="-78"/>
               </a:rPr>
               <a:t>كَانَ الزُّمَلَاءُ لُطَفَاءَ</a:t>
@@ -39917,6 +40174,7 @@
                   <a:srgbClr val="1B3B6F"/>
                 </a:solidFill>
                 <a:latin typeface="Amiri" pitchFamily="2" charset="-78"/>
+                <a:ea typeface="Amiri" pitchFamily="2" charset="-78"/>
                 <a:cs typeface="Amiri" pitchFamily="2" charset="-78"/>
               </a:rPr>
               <a:t>كَانَ العَمَلُ مُتْعِبًا</a:t>
@@ -40050,6 +40308,7 @@
                   <a:srgbClr val="D4AF37"/>
                 </a:solidFill>
                 <a:latin typeface="Amiri" pitchFamily="2" charset="-78"/>
+                <a:ea typeface="Amiri" pitchFamily="2" charset="-78"/>
                 <a:cs typeface="Amiri" pitchFamily="2" charset="-78"/>
               </a:rPr>
               <a:t>م</a:t>
@@ -40370,6 +40629,7 @@
                   <a:srgbClr val="8A6D1E"/>
                 </a:solidFill>
                 <a:latin typeface="Amiri" pitchFamily="2" charset="-78"/>
+                <a:ea typeface="Amiri" pitchFamily="2" charset="-78"/>
                 <a:cs typeface="Amiri" pitchFamily="2" charset="-78"/>
               </a:rPr>
               <a:t>فِي الغُرَفِ</a:t>
@@ -41546,6 +41806,7 @@
                   <a:srgbClr val="1B3B6F"/>
                 </a:solidFill>
                 <a:latin typeface="Amiri" pitchFamily="2" charset="-78"/>
+                <a:ea typeface="Amiri" pitchFamily="2" charset="-78"/>
                 <a:cs typeface="Amiri" pitchFamily="2" charset="-78"/>
               </a:rPr>
               <a:t>دَوْرُكَ!</a:t>
@@ -41622,6 +41883,7 @@
                   <a:srgbClr val="1B3B6F"/>
                 </a:solidFill>
                 <a:latin typeface="Amiri" pitchFamily="2" charset="-78"/>
+                <a:ea typeface="Amiri" pitchFamily="2" charset="-78"/>
                 <a:cs typeface="Amiri" pitchFamily="2" charset="-78"/>
               </a:rPr>
               <a:t>أَحْسَنْتَ! / أَحْسَنْتِ!</a:t>
@@ -41698,6 +41960,7 @@
                   <a:srgbClr val="1B3B6F"/>
                 </a:solidFill>
                 <a:latin typeface="Amiri" pitchFamily="2" charset="-78"/>
+                <a:ea typeface="Amiri" pitchFamily="2" charset="-78"/>
                 <a:cs typeface="Amiri" pitchFamily="2" charset="-78"/>
               </a:rPr>
               <a:t>تَكَلَّمْ أَكْثَرَ، مِنْ فَضْلِكَ</a:t>
@@ -41774,6 +42037,7 @@
                   <a:srgbClr val="1B3B6F"/>
                 </a:solidFill>
                 <a:latin typeface="Amiri" pitchFamily="2" charset="-78"/>
+                <a:ea typeface="Amiri" pitchFamily="2" charset="-78"/>
                 <a:cs typeface="Amiri" pitchFamily="2" charset="-78"/>
               </a:rPr>
               <a:t>لِمَاذَا؟</a:t>
@@ -41945,6 +42209,7 @@
                   <a:srgbClr val="D4AF37"/>
                 </a:solidFill>
                 <a:latin typeface="Amiri" pitchFamily="2" charset="-78"/>
+                <a:ea typeface="Amiri" pitchFamily="2" charset="-78"/>
                 <a:cs typeface="Amiri" pitchFamily="2" charset="-78"/>
               </a:rPr>
               <a:t>م</a:t>
@@ -42265,6 +42530,7 @@
                   <a:srgbClr val="8A6D1E"/>
                 </a:solidFill>
                 <a:latin typeface="Amiri" pitchFamily="2" charset="-78"/>
+                <a:ea typeface="Amiri" pitchFamily="2" charset="-78"/>
                 <a:cs typeface="Amiri" pitchFamily="2" charset="-78"/>
               </a:rPr>
               <a:t>عَمَلٌ فِي نِهَايَةِ الأُسْبُوعِ</a:t>
@@ -42545,6 +42811,7 @@
                   <a:srgbClr val="1B3B6F"/>
                 </a:solidFill>
                 <a:latin typeface="Amiri" pitchFamily="2" charset="-78"/>
+                <a:ea typeface="Amiri" pitchFamily="2" charset="-78"/>
                 <a:cs typeface="Amiri" pitchFamily="2" charset="-78"/>
               </a:rPr>
               <a:t>رَأَيْتُ إِعْلَانَ …</a:t>
@@ -42621,6 +42888,7 @@
                   <a:srgbClr val="1B3B6F"/>
                 </a:solidFill>
                 <a:latin typeface="Amiri" pitchFamily="2" charset="-78"/>
+                <a:ea typeface="Amiri" pitchFamily="2" charset="-78"/>
                 <a:cs typeface="Amiri" pitchFamily="2" charset="-78"/>
               </a:rPr>
               <a:t>أَهْلًا! كَيْفَ أُسَاعِدُكَ؟</a:t>
@@ -42789,6 +43057,7 @@
                   <a:srgbClr val="1B3B6F"/>
                 </a:solidFill>
                 <a:latin typeface="Amiri" pitchFamily="2" charset="-78"/>
+                <a:ea typeface="Amiri" pitchFamily="2" charset="-78"/>
                 <a:cs typeface="Amiri" pitchFamily="2" charset="-78"/>
               </a:rPr>
               <a:t>أَسْتَطِيعُ أَنْ أَعْمَلَ يَوْمَ …</a:t>
@@ -42865,6 +43134,7 @@
                   <a:srgbClr val="1B3B6F"/>
                 </a:solidFill>
                 <a:latin typeface="Amiri" pitchFamily="2" charset="-78"/>
+                <a:ea typeface="Amiri" pitchFamily="2" charset="-78"/>
                 <a:cs typeface="Amiri" pitchFamily="2" charset="-78"/>
               </a:rPr>
               <a:t>مَتَى تَسْتَطِيعُ أَنْ تَعْمَلَ؟</a:t>
@@ -43033,6 +43303,7 @@
                   <a:srgbClr val="1B3B6F"/>
                 </a:solidFill>
                 <a:latin typeface="Amiri" pitchFamily="2" charset="-78"/>
+                <a:ea typeface="Amiri" pitchFamily="2" charset="-78"/>
                 <a:cs typeface="Amiri" pitchFamily="2" charset="-78"/>
               </a:rPr>
               <a:t>كَمْ … فِي السَّاعَةِ؟</a:t>
@@ -43109,6 +43380,7 @@
                   <a:srgbClr val="1B3B6F"/>
                 </a:solidFill>
                 <a:latin typeface="Amiri" pitchFamily="2" charset="-78"/>
+                <a:ea typeface="Amiri" pitchFamily="2" charset="-78"/>
                 <a:cs typeface="Amiri" pitchFamily="2" charset="-78"/>
               </a:rPr>
               <a:t>العَمَلُ مِنَ التَّاسِعَةِ إِلَى الثَّالِثَةِ.</a:t>
@@ -43277,6 +43549,7 @@
                   <a:srgbClr val="1B3B6F"/>
                 </a:solidFill>
                 <a:latin typeface="Amiri" pitchFamily="2" charset="-78"/>
+                <a:ea typeface="Amiri" pitchFamily="2" charset="-78"/>
                 <a:cs typeface="Amiri" pitchFamily="2" charset="-78"/>
               </a:rPr>
               <a:t>مَاذَا سَأَفْعَلُ …؟</a:t>
@@ -43353,6 +43626,7 @@
                   <a:srgbClr val="1B3B6F"/>
                 </a:solidFill>
                 <a:latin typeface="Amiri" pitchFamily="2" charset="-78"/>
+                <a:ea typeface="Amiri" pitchFamily="2" charset="-78"/>
                 <a:cs typeface="Amiri" pitchFamily="2" charset="-78"/>
               </a:rPr>
               <a:t>عَشَرَةُ جُنَيْهَاتٍ.</a:t>
@@ -43521,6 +43795,7 @@
                   <a:srgbClr val="1B3B6F"/>
                 </a:solidFill>
                 <a:latin typeface="Amiri" pitchFamily="2" charset="-78"/>
+                <a:ea typeface="Amiri" pitchFamily="2" charset="-78"/>
                 <a:cs typeface="Amiri" pitchFamily="2" charset="-78"/>
               </a:rPr>
               <a:t>نَعَمْ، عَمِلْتُ فِي … / لَا، …</a:t>
@@ -43597,6 +43872,7 @@
                   <a:srgbClr val="1B3B6F"/>
                 </a:solidFill>
                 <a:latin typeface="Amiri" pitchFamily="2" charset="-78"/>
+                <a:ea typeface="Amiri" pitchFamily="2" charset="-78"/>
                 <a:cs typeface="Amiri" pitchFamily="2" charset="-78"/>
               </a:rPr>
               <a:t>هَلْ عَمِلْتَ مِنْ قَبْلُ؟</a:t>
@@ -43871,6 +44147,7 @@
                   <a:srgbClr val="D4AF37"/>
                 </a:solidFill>
                 <a:latin typeface="Amiri" pitchFamily="2" charset="-78"/>
+                <a:ea typeface="Amiri" pitchFamily="2" charset="-78"/>
                 <a:cs typeface="Amiri" pitchFamily="2" charset="-78"/>
               </a:rPr>
               <a:t>م</a:t>
@@ -44191,6 +44468,7 @@
                   <a:srgbClr val="8A6D1E"/>
                 </a:solidFill>
                 <a:latin typeface="Amiri" pitchFamily="2" charset="-78"/>
+                <a:ea typeface="Amiri" pitchFamily="2" charset="-78"/>
                 <a:cs typeface="Amiri" pitchFamily="2" charset="-78"/>
               </a:rPr>
               <a:t>أَيُّ عَمَلٍ أَخْتَارُ؟</a:t>
@@ -44471,6 +44749,7 @@
                   <a:srgbClr val="1B3B6F"/>
                 </a:solidFill>
                 <a:latin typeface="Amiri" pitchFamily="2" charset="-78"/>
+                <a:ea typeface="Amiri" pitchFamily="2" charset="-78"/>
                 <a:cs typeface="Amiri" pitchFamily="2" charset="-78"/>
               </a:rPr>
               <a:t>الأَوَّلُ فِي … وَالثَّانِي فِي …</a:t>
@@ -44547,6 +44826,7 @@
                   <a:srgbClr val="1B3B6F"/>
                 </a:solidFill>
                 <a:latin typeface="Amiri" pitchFamily="2" charset="-78"/>
+                <a:ea typeface="Amiri" pitchFamily="2" charset="-78"/>
                 <a:cs typeface="Amiri" pitchFamily="2" charset="-78"/>
               </a:rPr>
               <a:t>مَا العَمَلَانِ؟</a:t>
@@ -44715,6 +44995,7 @@
                   <a:srgbClr val="1B3B6F"/>
                 </a:solidFill>
                 <a:latin typeface="Amiri" pitchFamily="2" charset="-78"/>
+                <a:ea typeface="Amiri" pitchFamily="2" charset="-78"/>
                 <a:cs typeface="Amiri" pitchFamily="2" charset="-78"/>
               </a:rPr>
               <a:t>سَاعَاتُ … أَطْوَلُ مِنْ …</a:t>
@@ -44791,6 +45072,7 @@
                   <a:srgbClr val="1B3B6F"/>
                 </a:solidFill>
                 <a:latin typeface="Amiri" pitchFamily="2" charset="-78"/>
+                <a:ea typeface="Amiri" pitchFamily="2" charset="-78"/>
                 <a:cs typeface="Amiri" pitchFamily="2" charset="-78"/>
               </a:rPr>
               <a:t>وَالسَّاعَاتُ؟</a:t>
@@ -44959,6 +45241,7 @@
                   <a:srgbClr val="1B3B6F"/>
                 </a:solidFill>
                 <a:latin typeface="Amiri" pitchFamily="2" charset="-78"/>
+                <a:ea typeface="Amiri" pitchFamily="2" charset="-78"/>
                 <a:cs typeface="Amiri" pitchFamily="2" charset="-78"/>
               </a:rPr>
               <a:t>المَطْعَمُ أَعْلَى أَجْرًا، لٰكِنَّ …</a:t>
@@ -45035,6 +45318,7 @@
                   <a:srgbClr val="1B3B6F"/>
                 </a:solidFill>
                 <a:latin typeface="Amiri" pitchFamily="2" charset="-78"/>
+                <a:ea typeface="Amiri" pitchFamily="2" charset="-78"/>
                 <a:cs typeface="Amiri" pitchFamily="2" charset="-78"/>
               </a:rPr>
               <a:t>وَالأَجْرُ؟</a:t>
@@ -45138,6 +45422,7 @@
                   <a:srgbClr val="1B3B6F"/>
                 </a:solidFill>
                 <a:latin typeface="Amiri" pitchFamily="2" charset="-78"/>
+                <a:ea typeface="Amiri" pitchFamily="2" charset="-78"/>
                 <a:cs typeface="Amiri" pitchFamily="2" charset="-78"/>
               </a:rPr>
               <a:t>كَيْفَ هُوَ؟ هَلْ …؟</a:t>
@@ -45214,6 +45499,7 @@
                   <a:srgbClr val="1B3B6F"/>
                 </a:solidFill>
                 <a:latin typeface="Amiri" pitchFamily="2" charset="-78"/>
+                <a:ea typeface="Amiri" pitchFamily="2" charset="-78"/>
                 <a:cs typeface="Amiri" pitchFamily="2" charset="-78"/>
               </a:rPr>
               <a:t>أَنَا أَعْرِفُ مُدِيرَ المَكْتَبَةِ.</a:t>
@@ -45317,6 +45603,7 @@
                   <a:srgbClr val="1B3B6F"/>
                 </a:solidFill>
                 <a:latin typeface="Amiri" pitchFamily="2" charset="-78"/>
+                <a:ea typeface="Amiri" pitchFamily="2" charset="-78"/>
                 <a:cs typeface="Amiri" pitchFamily="2" charset="-78"/>
               </a:rPr>
               <a:t>سَأَخْتَارُ … لِأَنَّ …</a:t>
@@ -45393,6 +45680,7 @@
                   <a:srgbClr val="1B3B6F"/>
                 </a:solidFill>
                 <a:latin typeface="Amiri" pitchFamily="2" charset="-78"/>
+                <a:ea typeface="Amiri" pitchFamily="2" charset="-78"/>
                 <a:cs typeface="Amiri" pitchFamily="2" charset="-78"/>
               </a:rPr>
               <a:t>إِذَنْ، أَيُّهُمَا سَتَخْتَارُ؟</a:t>
@@ -45567,13 +45855,9 @@
     <a:fontScheme name="Office">
       <a:majorFont>
         <a:latin typeface="Calibri Light" panose="020F0302020204030204"/>
-        <a:ea typeface=""/>
-        <a:cs typeface=""/>
-        <a:font script="Jpan" typeface="游ゴシック Light"/>
-        <a:font script="Hang" typeface="맑은 고딕"/>
-        <a:font script="Hans" typeface="等线 Light"/>
-        <a:font script="Hant" typeface="新細明體"/>
-        <a:font script="Arab" typeface="Times New Roman"/>
+        <a:ea typeface="Amiri" pitchFamily="2" charset="-78"/>
+        <a:cs typeface="Amiri" pitchFamily="2" charset="-78"/>
+        <a:font script="Arab" typeface="Amiri"/>
         <a:font script="Hebr" typeface="Times New Roman"/>
         <a:font script="Thai" typeface="Angsana New"/>
         <a:font script="Ethi" typeface="Nyala"/>
@@ -45619,13 +45903,9 @@
       </a:majorFont>
       <a:minorFont>
         <a:latin typeface="Calibri" panose="020F0502020204030204"/>
-        <a:ea typeface=""/>
-        <a:cs typeface=""/>
-        <a:font script="Jpan" typeface="游ゴシック"/>
-        <a:font script="Hang" typeface="맑은 고딕"/>
-        <a:font script="Hans" typeface="等线"/>
-        <a:font script="Hant" typeface="新細明體"/>
-        <a:font script="Arab" typeface="Arial"/>
+        <a:ea typeface="Amiri" pitchFamily="2" charset="-78"/>
+        <a:cs typeface="Amiri" pitchFamily="2" charset="-78"/>
+        <a:font script="Arab" typeface="Amiri"/>
         <a:font script="Hebr" typeface="Arial"/>
         <a:font script="Thai" typeface="Cordia New"/>
         <a:font script="Ethi" typeface="Nyala"/>
